--- a/public/lessons/year-6-maths/autumn/week-3/multiply-two-digit-numbers/teaching-powerpoint-v1.pptx
+++ b/public/lessons/year-6-maths/autumn/week-3/multiply-two-digit-numbers/teaching-powerpoint-v1.pptx
@@ -2,24 +2,24 @@
 <file path=ppt/presentation.xml><?xml version="1.0" encoding="utf-8"?>
 <p:presentation xmlns:p="http://schemas.openxmlformats.org/presentationml/2006/main">
   <p:sldMasterIdLst>
-    <p:sldMasterId xmlns:r="http://schemas.openxmlformats.org/officeDocument/2006/relationships" id="2147483648" r:id="Rae7c3097054149d7"/>
+    <p:sldMasterId xmlns:r="http://schemas.openxmlformats.org/officeDocument/2006/relationships" id="2147483648" r:id="Rc3fcd7bfc22d4072"/>
   </p:sldMasterIdLst>
   <p:notesMasterIdLst>
-    <p:notesMasterId xmlns:r="http://schemas.openxmlformats.org/officeDocument/2006/relationships" r:id="R05e0ef8b720d400d"/>
+    <p:notesMasterId xmlns:r="http://schemas.openxmlformats.org/officeDocument/2006/relationships" r:id="R3bff6743d64a49a0"/>
   </p:notesMasterIdLst>
   <p:sldIdLst>
-    <p:sldId xmlns:r="http://schemas.openxmlformats.org/officeDocument/2006/relationships" id="256" r:id="R7001eae494794f0b"/>
-    <p:sldId xmlns:r="http://schemas.openxmlformats.org/officeDocument/2006/relationships" id="257" r:id="Re2cb7a156c404744"/>
-    <p:sldId xmlns:r="http://schemas.openxmlformats.org/officeDocument/2006/relationships" id="258" r:id="R8368312eb5264645"/>
-    <p:sldId xmlns:r="http://schemas.openxmlformats.org/officeDocument/2006/relationships" id="259" r:id="R7d340b3abc454fb6"/>
-    <p:sldId xmlns:r="http://schemas.openxmlformats.org/officeDocument/2006/relationships" id="260" r:id="R7ca984230624443f"/>
-    <p:sldId xmlns:r="http://schemas.openxmlformats.org/officeDocument/2006/relationships" id="261" r:id="R223a4d669859452a"/>
-    <p:sldId xmlns:r="http://schemas.openxmlformats.org/officeDocument/2006/relationships" id="262" r:id="Rd16230e044c64d24"/>
-    <p:sldId xmlns:r="http://schemas.openxmlformats.org/officeDocument/2006/relationships" id="263" r:id="R1d1a9d634cbe433a"/>
-    <p:sldId xmlns:r="http://schemas.openxmlformats.org/officeDocument/2006/relationships" id="264" r:id="R8fd347f478a340e0"/>
-    <p:sldId xmlns:r="http://schemas.openxmlformats.org/officeDocument/2006/relationships" id="265" r:id="R993e46be10d64c95"/>
-    <p:sldId xmlns:r="http://schemas.openxmlformats.org/officeDocument/2006/relationships" id="266" r:id="R2ceb0ac57458429f"/>
-    <p:sldId xmlns:r="http://schemas.openxmlformats.org/officeDocument/2006/relationships" id="267" r:id="Rb3b5ce7bad8e4abe"/>
+    <p:sldId xmlns:r="http://schemas.openxmlformats.org/officeDocument/2006/relationships" id="256" r:id="R667c47bce362448d"/>
+    <p:sldId xmlns:r="http://schemas.openxmlformats.org/officeDocument/2006/relationships" id="257" r:id="R3b216cb68c28462d"/>
+    <p:sldId xmlns:r="http://schemas.openxmlformats.org/officeDocument/2006/relationships" id="258" r:id="Rf77e6b91dde644f0"/>
+    <p:sldId xmlns:r="http://schemas.openxmlformats.org/officeDocument/2006/relationships" id="259" r:id="R45beb40f3100494d"/>
+    <p:sldId xmlns:r="http://schemas.openxmlformats.org/officeDocument/2006/relationships" id="260" r:id="R258f5a49771545c8"/>
+    <p:sldId xmlns:r="http://schemas.openxmlformats.org/officeDocument/2006/relationships" id="261" r:id="R99158516a98d42e8"/>
+    <p:sldId xmlns:r="http://schemas.openxmlformats.org/officeDocument/2006/relationships" id="262" r:id="Re2e31db22f2a4f85"/>
+    <p:sldId xmlns:r="http://schemas.openxmlformats.org/officeDocument/2006/relationships" id="263" r:id="Red7d203af5f54e42"/>
+    <p:sldId xmlns:r="http://schemas.openxmlformats.org/officeDocument/2006/relationships" id="264" r:id="R11d59abba265451a"/>
+    <p:sldId xmlns:r="http://schemas.openxmlformats.org/officeDocument/2006/relationships" id="265" r:id="R30ed423e63874805"/>
+    <p:sldId xmlns:r="http://schemas.openxmlformats.org/officeDocument/2006/relationships" id="266" r:id="Rdf94addc92c44f62"/>
+    <p:sldId xmlns:r="http://schemas.openxmlformats.org/officeDocument/2006/relationships" id="267" r:id="R138718d02f3a48c7"/>
   </p:sldIdLst>
   <p:sldSz cx="12192000" cy="6858000"/>
   <p:notesSz cx="6858000" cy="9144000"/>
@@ -873,7 +873,7 @@
           <a:lstStyle xmlns:a="http://schemas.openxmlformats.org/drawingml/2006/main"/>
           <a:p xmlns:a="http://schemas.openxmlformats.org/drawingml/2006/main">
             <a:r>
-              <a:t>I do. Reveal the question, setup and each calculation stage one click at a time. Pupils watch before copying. Model answer: 1,692.</a:t>
+              <a:t>I do. Reveal the question, then reveal each mathematical change one click at a time. Point to the numbers and operation that changed before moving to the next line. Final answer: 1,692.</a:t>
             </a:r>
           </a:p>
         </p:txBody>
@@ -1291,7 +1291,7 @@
   </p:cSld>
   <p:clrMap bg1="lt1" tx1="dk1" bg2="lt2" tx2="dk2" accent1="accent1" accent2="accent2" accent3="accent3" accent4="accent4" accent5="accent5" accent6="accent6" hlink="hlink" folHlink="folHlink"/>
   <p:sldLayoutIdLst>
-    <p:sldLayoutId xmlns:r="http://schemas.openxmlformats.org/officeDocument/2006/relationships" id="2147483649" r:id="R61183574565f4394"/>
+    <p:sldLayoutId xmlns:r="http://schemas.openxmlformats.org/officeDocument/2006/relationships" id="2147483649" r:id="R5da15486c43a40a5"/>
   </p:sldLayoutIdLst>
   <p:txStyles>
     <p:titleStyle>
@@ -1842,7 +1842,7 @@
           <p:cNvPr id="12" name="">
             <a:extLst xmlns:a="http://schemas.openxmlformats.org/drawingml/2006/main">
               <a:ext uri="{FF2B5EF4-FFF2-40B4-BE49-F238E27FC236}">
-                <a16:creationId xmlns:a16="http://schemas.microsoft.com/office/drawing/2014/main" id="{0834DA6B-686E-4C9E-B13E-1608A7D79CDC}"/>
+                <a16:creationId xmlns:a16="http://schemas.microsoft.com/office/drawing/2014/main" id="{BFE368F4-3ED6-4F6B-B1A4-25DC0C460EAE}"/>
               </a:ext>
             </a:extLst>
           </p:cNvPr>
@@ -1874,7 +1874,7 @@
           <p:cNvPr id="2" name="">
             <a:extLst xmlns:a="http://schemas.openxmlformats.org/drawingml/2006/main">
               <a:ext uri="{FF2B5EF4-FFF2-40B4-BE49-F238E27FC236}">
-                <a16:creationId xmlns:a16="http://schemas.microsoft.com/office/drawing/2014/main" id="{D3C01816-8468-4AE5-84D2-176CB1E30ED6}"/>
+                <a16:creationId xmlns:a16="http://schemas.microsoft.com/office/drawing/2014/main" id="{9AD61CAF-B85C-4AEB-BAC4-E66194779687}"/>
               </a:ext>
             </a:extLst>
           </p:cNvPr>
@@ -1931,7 +1931,7 @@
           <p:cNvPr id="3" name="">
             <a:extLst xmlns:a="http://schemas.openxmlformats.org/drawingml/2006/main">
               <a:ext uri="{FF2B5EF4-FFF2-40B4-BE49-F238E27FC236}">
-                <a16:creationId xmlns:a16="http://schemas.microsoft.com/office/drawing/2014/main" id="{AD354BF0-0AC0-4C39-8A1D-59991C870581}"/>
+                <a16:creationId xmlns:a16="http://schemas.microsoft.com/office/drawing/2014/main" id="{6E01CDFD-29C9-443A-A443-6A2957B7DB83}"/>
               </a:ext>
             </a:extLst>
           </p:cNvPr>
@@ -1965,7 +1965,7 @@
           <p:cNvPr id="4" name="">
             <a:extLst xmlns:a="http://schemas.openxmlformats.org/drawingml/2006/main">
               <a:ext uri="{FF2B5EF4-FFF2-40B4-BE49-F238E27FC236}">
-                <a16:creationId xmlns:a16="http://schemas.microsoft.com/office/drawing/2014/main" id="{731E6A7B-FFFC-4728-92D8-A3969D642730}"/>
+                <a16:creationId xmlns:a16="http://schemas.microsoft.com/office/drawing/2014/main" id="{8B20D025-D156-42FA-8B6E-601FFCCADA9B}"/>
               </a:ext>
             </a:extLst>
           </p:cNvPr>
@@ -2022,7 +2022,7 @@
           <p:cNvPr id="5" name="">
             <a:extLst xmlns:a="http://schemas.openxmlformats.org/drawingml/2006/main">
               <a:ext uri="{FF2B5EF4-FFF2-40B4-BE49-F238E27FC236}">
-                <a16:creationId xmlns:a16="http://schemas.microsoft.com/office/drawing/2014/main" id="{3A8E76B9-F385-4C60-920C-8897E05D8A81}"/>
+                <a16:creationId xmlns:a16="http://schemas.microsoft.com/office/drawing/2014/main" id="{7BDE91AA-4EBC-467B-8CE4-634868B2FEFE}"/>
               </a:ext>
             </a:extLst>
           </p:cNvPr>
@@ -2079,7 +2079,7 @@
           <p:cNvPr id="6" name="">
             <a:extLst xmlns:a="http://schemas.openxmlformats.org/drawingml/2006/main">
               <a:ext uri="{FF2B5EF4-FFF2-40B4-BE49-F238E27FC236}">
-                <a16:creationId xmlns:a16="http://schemas.microsoft.com/office/drawing/2014/main" id="{C86637CA-00DD-4342-9B8D-4CD7BFB9AF6E}"/>
+                <a16:creationId xmlns:a16="http://schemas.microsoft.com/office/drawing/2014/main" id="{63D4E0C3-022D-46D3-8549-48CD99ACB074}"/>
               </a:ext>
             </a:extLst>
           </p:cNvPr>
@@ -2113,7 +2113,7 @@
           <p:cNvPr id="7" name="">
             <a:extLst xmlns:a="http://schemas.openxmlformats.org/drawingml/2006/main">
               <a:ext uri="{FF2B5EF4-FFF2-40B4-BE49-F238E27FC236}">
-                <a16:creationId xmlns:a16="http://schemas.microsoft.com/office/drawing/2014/main" id="{8CCA071D-D71E-4676-81F2-75A6EBA3EA77}"/>
+                <a16:creationId xmlns:a16="http://schemas.microsoft.com/office/drawing/2014/main" id="{FD7F94C9-6825-4830-9758-5033A14ACC2E}"/>
               </a:ext>
             </a:extLst>
           </p:cNvPr>
@@ -2170,7 +2170,7 @@
           <p:cNvPr id="8" name="">
             <a:extLst xmlns:a="http://schemas.openxmlformats.org/drawingml/2006/main">
               <a:ext uri="{FF2B5EF4-FFF2-40B4-BE49-F238E27FC236}">
-                <a16:creationId xmlns:a16="http://schemas.microsoft.com/office/drawing/2014/main" id="{725E87C5-09D8-4A05-BF4A-B69B12240116}"/>
+                <a16:creationId xmlns:a16="http://schemas.microsoft.com/office/drawing/2014/main" id="{76F9A1B9-EF88-48C9-AC97-35071FC4C1A3}"/>
               </a:ext>
             </a:extLst>
           </p:cNvPr>
@@ -2227,7 +2227,7 @@
           <p:cNvPr id="9" name="">
             <a:extLst xmlns:a="http://schemas.openxmlformats.org/drawingml/2006/main">
               <a:ext uri="{FF2B5EF4-FFF2-40B4-BE49-F238E27FC236}">
-                <a16:creationId xmlns:a16="http://schemas.microsoft.com/office/drawing/2014/main" id="{2AE189F1-3A62-418F-B2B9-888E30873817}"/>
+                <a16:creationId xmlns:a16="http://schemas.microsoft.com/office/drawing/2014/main" id="{179CD58A-0664-42C9-91EF-06C9752B587E}"/>
               </a:ext>
             </a:extLst>
           </p:cNvPr>
@@ -2284,7 +2284,7 @@
           <p:cNvPr id="10" name="">
             <a:extLst xmlns:a="http://schemas.openxmlformats.org/drawingml/2006/main">
               <a:ext uri="{FF2B5EF4-FFF2-40B4-BE49-F238E27FC236}">
-                <a16:creationId xmlns:a16="http://schemas.microsoft.com/office/drawing/2014/main" id="{758EEF43-C535-4414-A5D2-0BFC8E27E0A0}"/>
+                <a16:creationId xmlns:a16="http://schemas.microsoft.com/office/drawing/2014/main" id="{66A8C421-55AA-4055-A476-E15BF8F72BFF}"/>
               </a:ext>
             </a:extLst>
           </p:cNvPr>
@@ -2341,7 +2341,7 @@
           <p:cNvPr id="11" name="">
             <a:extLst xmlns:a="http://schemas.openxmlformats.org/drawingml/2006/main">
               <a:ext uri="{FF2B5EF4-FFF2-40B4-BE49-F238E27FC236}">
-                <a16:creationId xmlns:a16="http://schemas.microsoft.com/office/drawing/2014/main" id="{1646752F-ED7B-4B63-AE56-3322F4A4DE44}"/>
+                <a16:creationId xmlns:a16="http://schemas.microsoft.com/office/drawing/2014/main" id="{5077B42B-F93E-4BAB-80F0-639810694D34}"/>
               </a:ext>
             </a:extLst>
           </p:cNvPr>
@@ -2396,7 +2396,7 @@
     </p:spTree>
     <p:extLst>
       <p:ext uri="{BB962C8B-B14F-4D97-AF65-F5344CB8AC3E}">
-        <p14:creationId xmlns:p14="http://schemas.microsoft.com/office/powerpoint/2010/main" val="1111875344"/>
+        <p14:creationId xmlns:p14="http://schemas.microsoft.com/office/powerpoint/2010/main" val="1479448763"/>
       </p:ext>
     </p:extLst>
   </p:cSld>
@@ -2427,7 +2427,7 @@
           <p:cNvPr id="14" name="">
             <a:extLst xmlns:a="http://schemas.openxmlformats.org/drawingml/2006/main">
               <a:ext uri="{FF2B5EF4-FFF2-40B4-BE49-F238E27FC236}">
-                <a16:creationId xmlns:a16="http://schemas.microsoft.com/office/drawing/2014/main" id="{6A3E6D58-8D6D-4259-A12B-32B3BFA7E81A}"/>
+                <a16:creationId xmlns:a16="http://schemas.microsoft.com/office/drawing/2014/main" id="{A51AB051-0FA6-47B9-A132-E63197F9264F}"/>
               </a:ext>
             </a:extLst>
           </p:cNvPr>
@@ -2459,7 +2459,7 @@
           <p:cNvPr id="2" name="">
             <a:extLst xmlns:a="http://schemas.openxmlformats.org/drawingml/2006/main">
               <a:ext uri="{FF2B5EF4-FFF2-40B4-BE49-F238E27FC236}">
-                <a16:creationId xmlns:a16="http://schemas.microsoft.com/office/drawing/2014/main" id="{BA7C831F-5948-423D-8621-38E64FC7556B}"/>
+                <a16:creationId xmlns:a16="http://schemas.microsoft.com/office/drawing/2014/main" id="{136DDF51-54F1-4344-B30E-5F1B05AAC332}"/>
               </a:ext>
             </a:extLst>
           </p:cNvPr>
@@ -2516,7 +2516,7 @@
           <p:cNvPr id="3" name="">
             <a:extLst xmlns:a="http://schemas.openxmlformats.org/drawingml/2006/main">
               <a:ext uri="{FF2B5EF4-FFF2-40B4-BE49-F238E27FC236}">
-                <a16:creationId xmlns:a16="http://schemas.microsoft.com/office/drawing/2014/main" id="{DF0907F6-755B-4207-93D1-081E68F0B143}"/>
+                <a16:creationId xmlns:a16="http://schemas.microsoft.com/office/drawing/2014/main" id="{F61AEFD4-D13A-45CE-84C7-FE877246CE77}"/>
               </a:ext>
             </a:extLst>
           </p:cNvPr>
@@ -2548,7 +2548,7 @@
           <p:cNvPr id="4" name="">
             <a:extLst xmlns:a="http://schemas.openxmlformats.org/drawingml/2006/main">
               <a:ext uri="{FF2B5EF4-FFF2-40B4-BE49-F238E27FC236}">
-                <a16:creationId xmlns:a16="http://schemas.microsoft.com/office/drawing/2014/main" id="{ECAB399F-F7FB-4DAF-A7A6-FB971DEDA7E7}"/>
+                <a16:creationId xmlns:a16="http://schemas.microsoft.com/office/drawing/2014/main" id="{46373A4E-3459-4B57-BEE4-1C3D7F8C46B3}"/>
               </a:ext>
             </a:extLst>
           </p:cNvPr>
@@ -2605,7 +2605,7 @@
           <p:cNvPr id="5" name="">
             <a:extLst xmlns:a="http://schemas.openxmlformats.org/drawingml/2006/main">
               <a:ext uri="{FF2B5EF4-FFF2-40B4-BE49-F238E27FC236}">
-                <a16:creationId xmlns:a16="http://schemas.microsoft.com/office/drawing/2014/main" id="{339075EC-90C3-46BC-91A6-B3AA636BF244}"/>
+                <a16:creationId xmlns:a16="http://schemas.microsoft.com/office/drawing/2014/main" id="{3C0AFB84-4463-41FD-9EE8-1DFE9CBE95D6}"/>
               </a:ext>
             </a:extLst>
           </p:cNvPr>
@@ -2662,7 +2662,7 @@
           <p:cNvPr id="6" name="">
             <a:extLst xmlns:a="http://schemas.openxmlformats.org/drawingml/2006/main">
               <a:ext uri="{FF2B5EF4-FFF2-40B4-BE49-F238E27FC236}">
-                <a16:creationId xmlns:a16="http://schemas.microsoft.com/office/drawing/2014/main" id="{E25A6301-1CEF-409B-AEA4-65D1523845EB}"/>
+                <a16:creationId xmlns:a16="http://schemas.microsoft.com/office/drawing/2014/main" id="{FA165688-4B2C-452D-A756-B476F329705F}"/>
               </a:ext>
             </a:extLst>
           </p:cNvPr>
@@ -2719,7 +2719,7 @@
           <p:cNvPr id="7" name="">
             <a:extLst xmlns:a="http://schemas.openxmlformats.org/drawingml/2006/main">
               <a:ext uri="{FF2B5EF4-FFF2-40B4-BE49-F238E27FC236}">
-                <a16:creationId xmlns:a16="http://schemas.microsoft.com/office/drawing/2014/main" id="{B3D74CC7-7AFF-4CF6-89BE-CBCB1E1C6FC0}"/>
+                <a16:creationId xmlns:a16="http://schemas.microsoft.com/office/drawing/2014/main" id="{1AB72D4F-C110-43BE-9EE8-5A9D65115ED4}"/>
               </a:ext>
             </a:extLst>
           </p:cNvPr>
@@ -2751,7 +2751,7 @@
           <p:cNvPr id="8" name="">
             <a:extLst xmlns:a="http://schemas.openxmlformats.org/drawingml/2006/main">
               <a:ext uri="{FF2B5EF4-FFF2-40B4-BE49-F238E27FC236}">
-                <a16:creationId xmlns:a16="http://schemas.microsoft.com/office/drawing/2014/main" id="{EDAB77FB-2996-4525-A266-3BEA8326FCF9}"/>
+                <a16:creationId xmlns:a16="http://schemas.microsoft.com/office/drawing/2014/main" id="{565726FA-31BF-455A-A97E-A3BC16D8A9A1}"/>
               </a:ext>
             </a:extLst>
           </p:cNvPr>
@@ -2808,7 +2808,7 @@
           <p:cNvPr id="9" name="">
             <a:extLst xmlns:a="http://schemas.openxmlformats.org/drawingml/2006/main">
               <a:ext uri="{FF2B5EF4-FFF2-40B4-BE49-F238E27FC236}">
-                <a16:creationId xmlns:a16="http://schemas.microsoft.com/office/drawing/2014/main" id="{03747978-5AFD-45FF-9BF7-68175CE00C49}"/>
+                <a16:creationId xmlns:a16="http://schemas.microsoft.com/office/drawing/2014/main" id="{E666B079-76AF-49D9-ABC9-A7165F6535D9}"/>
               </a:ext>
             </a:extLst>
           </p:cNvPr>
@@ -2865,7 +2865,7 @@
           <p:cNvPr id="10" name="">
             <a:extLst xmlns:a="http://schemas.openxmlformats.org/drawingml/2006/main">
               <a:ext uri="{FF2B5EF4-FFF2-40B4-BE49-F238E27FC236}">
-                <a16:creationId xmlns:a16="http://schemas.microsoft.com/office/drawing/2014/main" id="{837DCF08-7288-4C47-B97C-81B5770AC081}"/>
+                <a16:creationId xmlns:a16="http://schemas.microsoft.com/office/drawing/2014/main" id="{8AD455CE-6D7E-4358-97C2-860154DBF5D3}"/>
               </a:ext>
             </a:extLst>
           </p:cNvPr>
@@ -2922,7 +2922,7 @@
           <p:cNvPr id="11" name="">
             <a:extLst xmlns:a="http://schemas.openxmlformats.org/drawingml/2006/main">
               <a:ext uri="{FF2B5EF4-FFF2-40B4-BE49-F238E27FC236}">
-                <a16:creationId xmlns:a16="http://schemas.microsoft.com/office/drawing/2014/main" id="{D9FDA363-2488-4B64-8580-3BC9E790C5E2}"/>
+                <a16:creationId xmlns:a16="http://schemas.microsoft.com/office/drawing/2014/main" id="{A716A6BD-E885-4CAE-8419-93C48260E756}"/>
               </a:ext>
             </a:extLst>
           </p:cNvPr>
@@ -2979,7 +2979,7 @@
           <p:cNvPr id="12" name="">
             <a:extLst xmlns:a="http://schemas.openxmlformats.org/drawingml/2006/main">
               <a:ext uri="{FF2B5EF4-FFF2-40B4-BE49-F238E27FC236}">
-                <a16:creationId xmlns:a16="http://schemas.microsoft.com/office/drawing/2014/main" id="{520C0419-8EC4-462E-9216-047B77F285D1}"/>
+                <a16:creationId xmlns:a16="http://schemas.microsoft.com/office/drawing/2014/main" id="{D0F8075E-AF61-4C4C-97A9-5163363584CE}"/>
               </a:ext>
             </a:extLst>
           </p:cNvPr>
@@ -3036,7 +3036,7 @@
           <p:cNvPr id="13" name="">
             <a:extLst xmlns:a="http://schemas.openxmlformats.org/drawingml/2006/main">
               <a:ext uri="{FF2B5EF4-FFF2-40B4-BE49-F238E27FC236}">
-                <a16:creationId xmlns:a16="http://schemas.microsoft.com/office/drawing/2014/main" id="{F96D95D8-4350-4554-B55B-ACD0EC5AA1BD}"/>
+                <a16:creationId xmlns:a16="http://schemas.microsoft.com/office/drawing/2014/main" id="{A777C315-2FE1-4924-ACDF-AA23DD5F26F0}"/>
               </a:ext>
             </a:extLst>
           </p:cNvPr>
@@ -3091,7 +3091,7 @@
     </p:spTree>
     <p:extLst>
       <p:ext uri="{BB962C8B-B14F-4D97-AF65-F5344CB8AC3E}">
-        <p14:creationId xmlns:p14="http://schemas.microsoft.com/office/powerpoint/2010/main" val="2107540817"/>
+        <p14:creationId xmlns:p14="http://schemas.microsoft.com/office/powerpoint/2010/main" val="1898233657"/>
       </p:ext>
     </p:extLst>
   </p:cSld>
@@ -3292,7 +3292,7 @@
           <p:cNvPr id="19" name="">
             <a:extLst xmlns:a="http://schemas.openxmlformats.org/drawingml/2006/main">
               <a:ext uri="{FF2B5EF4-FFF2-40B4-BE49-F238E27FC236}">
-                <a16:creationId xmlns:a16="http://schemas.microsoft.com/office/drawing/2014/main" id="{8D31170F-E241-407F-8A6C-3BD70585983A}"/>
+                <a16:creationId xmlns:a16="http://schemas.microsoft.com/office/drawing/2014/main" id="{A2FE3489-BC2A-47AD-93C9-539B37DA9A8A}"/>
               </a:ext>
             </a:extLst>
           </p:cNvPr>
@@ -3324,7 +3324,7 @@
           <p:cNvPr id="2" name="">
             <a:extLst xmlns:a="http://schemas.openxmlformats.org/drawingml/2006/main">
               <a:ext uri="{FF2B5EF4-FFF2-40B4-BE49-F238E27FC236}">
-                <a16:creationId xmlns:a16="http://schemas.microsoft.com/office/drawing/2014/main" id="{79536EFF-1C47-4824-A932-622E92472E50}"/>
+                <a16:creationId xmlns:a16="http://schemas.microsoft.com/office/drawing/2014/main" id="{2051B9A3-86EB-4BB6-9354-8DAAE9B4278D}"/>
               </a:ext>
             </a:extLst>
           </p:cNvPr>
@@ -3381,7 +3381,7 @@
           <p:cNvPr id="3" name="">
             <a:extLst xmlns:a="http://schemas.openxmlformats.org/drawingml/2006/main">
               <a:ext uri="{FF2B5EF4-FFF2-40B4-BE49-F238E27FC236}">
-                <a16:creationId xmlns:a16="http://schemas.microsoft.com/office/drawing/2014/main" id="{F48EBD48-2BFA-4105-B8F0-D8C8EA35F9F3}"/>
+                <a16:creationId xmlns:a16="http://schemas.microsoft.com/office/drawing/2014/main" id="{88C9BC32-8428-4391-89CE-C6416D2F536F}"/>
               </a:ext>
             </a:extLst>
           </p:cNvPr>
@@ -3413,7 +3413,7 @@
           <p:cNvPr id="4" name="">
             <a:extLst xmlns:a="http://schemas.openxmlformats.org/drawingml/2006/main">
               <a:ext uri="{FF2B5EF4-FFF2-40B4-BE49-F238E27FC236}">
-                <a16:creationId xmlns:a16="http://schemas.microsoft.com/office/drawing/2014/main" id="{2A477C57-55A1-4E51-A08E-3AB07D39E2A9}"/>
+                <a16:creationId xmlns:a16="http://schemas.microsoft.com/office/drawing/2014/main" id="{315CDAE7-16DD-4AA0-B4DE-ED1FDC3C5C53}"/>
               </a:ext>
             </a:extLst>
           </p:cNvPr>
@@ -3470,7 +3470,7 @@
           <p:cNvPr id="5" name="">
             <a:extLst xmlns:a="http://schemas.openxmlformats.org/drawingml/2006/main">
               <a:ext uri="{FF2B5EF4-FFF2-40B4-BE49-F238E27FC236}">
-                <a16:creationId xmlns:a16="http://schemas.microsoft.com/office/drawing/2014/main" id="{66CFE75D-4D06-4518-93AD-DF4D068D4268}"/>
+                <a16:creationId xmlns:a16="http://schemas.microsoft.com/office/drawing/2014/main" id="{A83390E8-B31F-4C9D-8598-2B0AEB1F6369}"/>
               </a:ext>
             </a:extLst>
           </p:cNvPr>
@@ -3527,7 +3527,7 @@
           <p:cNvPr id="6" name="">
             <a:extLst xmlns:a="http://schemas.openxmlformats.org/drawingml/2006/main">
               <a:ext uri="{FF2B5EF4-FFF2-40B4-BE49-F238E27FC236}">
-                <a16:creationId xmlns:a16="http://schemas.microsoft.com/office/drawing/2014/main" id="{F40F8FF7-27F1-4C6A-ACB1-E1B72B42A30E}"/>
+                <a16:creationId xmlns:a16="http://schemas.microsoft.com/office/drawing/2014/main" id="{14DB2986-976D-4AB4-8312-AFABBEB468A3}"/>
               </a:ext>
             </a:extLst>
           </p:cNvPr>
@@ -3584,7 +3584,7 @@
           <p:cNvPr id="7" name="">
             <a:extLst xmlns:a="http://schemas.openxmlformats.org/drawingml/2006/main">
               <a:ext uri="{FF2B5EF4-FFF2-40B4-BE49-F238E27FC236}">
-                <a16:creationId xmlns:a16="http://schemas.microsoft.com/office/drawing/2014/main" id="{A9E6D720-A68E-4497-9B31-0CFDFB5CA1E8}"/>
+                <a16:creationId xmlns:a16="http://schemas.microsoft.com/office/drawing/2014/main" id="{4B403C49-AEFF-47E1-8CAE-2F2C2FF2CB74}"/>
               </a:ext>
             </a:extLst>
           </p:cNvPr>
@@ -3616,7 +3616,7 @@
           <p:cNvPr id="8" name="">
             <a:extLst xmlns:a="http://schemas.openxmlformats.org/drawingml/2006/main">
               <a:ext uri="{FF2B5EF4-FFF2-40B4-BE49-F238E27FC236}">
-                <a16:creationId xmlns:a16="http://schemas.microsoft.com/office/drawing/2014/main" id="{D433B74D-F8F3-46B5-9C96-D9BEA53F3A0B}"/>
+                <a16:creationId xmlns:a16="http://schemas.microsoft.com/office/drawing/2014/main" id="{3475D652-0F84-4E26-8EAE-6557C3487217}"/>
               </a:ext>
             </a:extLst>
           </p:cNvPr>
@@ -3673,7 +3673,7 @@
           <p:cNvPr id="9" name="">
             <a:extLst xmlns:a="http://schemas.openxmlformats.org/drawingml/2006/main">
               <a:ext uri="{FF2B5EF4-FFF2-40B4-BE49-F238E27FC236}">
-                <a16:creationId xmlns:a16="http://schemas.microsoft.com/office/drawing/2014/main" id="{0BE5BB58-D644-492B-A4F0-70AF428891E3}"/>
+                <a16:creationId xmlns:a16="http://schemas.microsoft.com/office/drawing/2014/main" id="{117A4071-7404-4DBA-9AB3-AE4EA7FF7BFE}"/>
               </a:ext>
             </a:extLst>
           </p:cNvPr>
@@ -3730,7 +3730,7 @@
           <p:cNvPr id="10" name="">
             <a:extLst xmlns:a="http://schemas.openxmlformats.org/drawingml/2006/main">
               <a:ext uri="{FF2B5EF4-FFF2-40B4-BE49-F238E27FC236}">
-                <a16:creationId xmlns:a16="http://schemas.microsoft.com/office/drawing/2014/main" id="{2577DB54-EC94-427C-B2D8-17AF5780EB91}"/>
+                <a16:creationId xmlns:a16="http://schemas.microsoft.com/office/drawing/2014/main" id="{4359F4EE-D797-4F87-B1D6-76322938D2C9}"/>
               </a:ext>
             </a:extLst>
           </p:cNvPr>
@@ -3787,7 +3787,7 @@
           <p:cNvPr id="11" name="">
             <a:extLst xmlns:a="http://schemas.openxmlformats.org/drawingml/2006/main">
               <a:ext uri="{FF2B5EF4-FFF2-40B4-BE49-F238E27FC236}">
-                <a16:creationId xmlns:a16="http://schemas.microsoft.com/office/drawing/2014/main" id="{74FD4A21-20E0-4BB2-883B-F8D72F07FF7D}"/>
+                <a16:creationId xmlns:a16="http://schemas.microsoft.com/office/drawing/2014/main" id="{458526C8-8237-427C-8321-0E840C0CB005}"/>
               </a:ext>
             </a:extLst>
           </p:cNvPr>
@@ -3821,7 +3821,7 @@
           <p:cNvPr id="12" name="">
             <a:extLst xmlns:a="http://schemas.openxmlformats.org/drawingml/2006/main">
               <a:ext uri="{FF2B5EF4-FFF2-40B4-BE49-F238E27FC236}">
-                <a16:creationId xmlns:a16="http://schemas.microsoft.com/office/drawing/2014/main" id="{6F9E399A-7082-4FF0-9BE6-753807618490}"/>
+                <a16:creationId xmlns:a16="http://schemas.microsoft.com/office/drawing/2014/main" id="{ED77DADA-45DE-408E-935F-94E9A1759DE5}"/>
               </a:ext>
             </a:extLst>
           </p:cNvPr>
@@ -3878,7 +3878,7 @@
           <p:cNvPr id="13" name="">
             <a:extLst xmlns:a="http://schemas.openxmlformats.org/drawingml/2006/main">
               <a:ext uri="{FF2B5EF4-FFF2-40B4-BE49-F238E27FC236}">
-                <a16:creationId xmlns:a16="http://schemas.microsoft.com/office/drawing/2014/main" id="{C658BBF7-2521-4F63-B663-D36777A2E35A}"/>
+                <a16:creationId xmlns:a16="http://schemas.microsoft.com/office/drawing/2014/main" id="{B61C38FB-CD00-468C-887F-BCBCE1FEB23D}"/>
               </a:ext>
             </a:extLst>
           </p:cNvPr>
@@ -3935,7 +3935,7 @@
           <p:cNvPr id="14" name="">
             <a:extLst xmlns:a="http://schemas.openxmlformats.org/drawingml/2006/main">
               <a:ext uri="{FF2B5EF4-FFF2-40B4-BE49-F238E27FC236}">
-                <a16:creationId xmlns:a16="http://schemas.microsoft.com/office/drawing/2014/main" id="{0B64186E-A84C-4BA1-B186-47D471D43EB2}"/>
+                <a16:creationId xmlns:a16="http://schemas.microsoft.com/office/drawing/2014/main" id="{D70F2B8F-829C-4CCA-A599-377F5306521E}"/>
               </a:ext>
             </a:extLst>
           </p:cNvPr>
@@ -3992,7 +3992,7 @@
           <p:cNvPr id="15" name="">
             <a:extLst xmlns:a="http://schemas.openxmlformats.org/drawingml/2006/main">
               <a:ext uri="{FF2B5EF4-FFF2-40B4-BE49-F238E27FC236}">
-                <a16:creationId xmlns:a16="http://schemas.microsoft.com/office/drawing/2014/main" id="{F6F7BDD5-8FD3-48A5-83D7-6234839083A5}"/>
+                <a16:creationId xmlns:a16="http://schemas.microsoft.com/office/drawing/2014/main" id="{16E15AA8-A205-43AF-ADDC-7A3796A165B6}"/>
               </a:ext>
             </a:extLst>
           </p:cNvPr>
@@ -4026,7 +4026,7 @@
           <p:cNvPr id="16" name="">
             <a:extLst xmlns:a="http://schemas.openxmlformats.org/drawingml/2006/main">
               <a:ext uri="{FF2B5EF4-FFF2-40B4-BE49-F238E27FC236}">
-                <a16:creationId xmlns:a16="http://schemas.microsoft.com/office/drawing/2014/main" id="{6C24D25E-98E3-4254-88A3-504AEC227F39}"/>
+                <a16:creationId xmlns:a16="http://schemas.microsoft.com/office/drawing/2014/main" id="{A32337E2-3105-4EE6-A8D8-02D748900E22}"/>
               </a:ext>
             </a:extLst>
           </p:cNvPr>
@@ -4083,7 +4083,7 @@
           <p:cNvPr id="17" name="">
             <a:extLst xmlns:a="http://schemas.openxmlformats.org/drawingml/2006/main">
               <a:ext uri="{FF2B5EF4-FFF2-40B4-BE49-F238E27FC236}">
-                <a16:creationId xmlns:a16="http://schemas.microsoft.com/office/drawing/2014/main" id="{258E273C-B1B5-4F42-AA8B-A9655B678499}"/>
+                <a16:creationId xmlns:a16="http://schemas.microsoft.com/office/drawing/2014/main" id="{40C502ED-2D2F-429F-8A37-7FCE8578A263}"/>
               </a:ext>
             </a:extLst>
           </p:cNvPr>
@@ -4140,7 +4140,7 @@
           <p:cNvPr id="18" name="">
             <a:extLst xmlns:a="http://schemas.openxmlformats.org/drawingml/2006/main">
               <a:ext uri="{FF2B5EF4-FFF2-40B4-BE49-F238E27FC236}">
-                <a16:creationId xmlns:a16="http://schemas.microsoft.com/office/drawing/2014/main" id="{10ECAE64-0B7C-4886-89B9-8D7EA68E36D9}"/>
+                <a16:creationId xmlns:a16="http://schemas.microsoft.com/office/drawing/2014/main" id="{F6810A96-EA4A-4900-A66D-66D0297A5908}"/>
               </a:ext>
             </a:extLst>
           </p:cNvPr>
@@ -4195,7 +4195,7 @@
     </p:spTree>
     <p:extLst>
       <p:ext uri="{BB962C8B-B14F-4D97-AF65-F5344CB8AC3E}">
-        <p14:creationId xmlns:p14="http://schemas.microsoft.com/office/powerpoint/2010/main" val="203413391"/>
+        <p14:creationId xmlns:p14="http://schemas.microsoft.com/office/powerpoint/2010/main" val="833249679"/>
       </p:ext>
     </p:extLst>
   </p:cSld>
@@ -4350,7 +4350,7 @@
           <p:cNvPr id="23" name="">
             <a:extLst xmlns:a="http://schemas.openxmlformats.org/drawingml/2006/main">
               <a:ext uri="{FF2B5EF4-FFF2-40B4-BE49-F238E27FC236}">
-                <a16:creationId xmlns:a16="http://schemas.microsoft.com/office/drawing/2014/main" id="{7E4A1EAF-3D5B-450A-B13F-0A61B204A4E9}"/>
+                <a16:creationId xmlns:a16="http://schemas.microsoft.com/office/drawing/2014/main" id="{C7617EFD-814D-4844-838E-23D604B089BC}"/>
               </a:ext>
             </a:extLst>
           </p:cNvPr>
@@ -4382,7 +4382,7 @@
           <p:cNvPr id="2" name="">
             <a:extLst xmlns:a="http://schemas.openxmlformats.org/drawingml/2006/main">
               <a:ext uri="{FF2B5EF4-FFF2-40B4-BE49-F238E27FC236}">
-                <a16:creationId xmlns:a16="http://schemas.microsoft.com/office/drawing/2014/main" id="{6B580B7A-A34C-4879-849D-A1BD4376DD87}"/>
+                <a16:creationId xmlns:a16="http://schemas.microsoft.com/office/drawing/2014/main" id="{FB94F7CB-D16E-4EA9-9608-FA8F41E12C7C}"/>
               </a:ext>
             </a:extLst>
           </p:cNvPr>
@@ -4439,7 +4439,7 @@
           <p:cNvPr id="3" name="">
             <a:extLst xmlns:a="http://schemas.openxmlformats.org/drawingml/2006/main">
               <a:ext uri="{FF2B5EF4-FFF2-40B4-BE49-F238E27FC236}">
-                <a16:creationId xmlns:a16="http://schemas.microsoft.com/office/drawing/2014/main" id="{0FA7D191-96D5-4862-93EB-F9701B7A48BF}"/>
+                <a16:creationId xmlns:a16="http://schemas.microsoft.com/office/drawing/2014/main" id="{669E8CB6-43B9-4FC7-B36E-BA4159B10747}"/>
               </a:ext>
             </a:extLst>
           </p:cNvPr>
@@ -4471,7 +4471,7 @@
           <p:cNvPr id="4" name="">
             <a:extLst xmlns:a="http://schemas.openxmlformats.org/drawingml/2006/main">
               <a:ext uri="{FF2B5EF4-FFF2-40B4-BE49-F238E27FC236}">
-                <a16:creationId xmlns:a16="http://schemas.microsoft.com/office/drawing/2014/main" id="{EB05D783-8DB7-47FD-9442-72604708941D}"/>
+                <a16:creationId xmlns:a16="http://schemas.microsoft.com/office/drawing/2014/main" id="{1813301C-C99E-4A6A-BF4A-4CE058A0DE7B}"/>
               </a:ext>
             </a:extLst>
           </p:cNvPr>
@@ -4528,7 +4528,7 @@
           <p:cNvPr id="5" name="">
             <a:extLst xmlns:a="http://schemas.openxmlformats.org/drawingml/2006/main">
               <a:ext uri="{FF2B5EF4-FFF2-40B4-BE49-F238E27FC236}">
-                <a16:creationId xmlns:a16="http://schemas.microsoft.com/office/drawing/2014/main" id="{4B8C05AC-E46B-4C39-9B4D-306D4E9F62BF}"/>
+                <a16:creationId xmlns:a16="http://schemas.microsoft.com/office/drawing/2014/main" id="{C44E9AFC-11C0-4847-A23D-E4D0D8B91379}"/>
               </a:ext>
             </a:extLst>
           </p:cNvPr>
@@ -4585,7 +4585,7 @@
           <p:cNvPr id="6" name="">
             <a:extLst xmlns:a="http://schemas.openxmlformats.org/drawingml/2006/main">
               <a:ext uri="{FF2B5EF4-FFF2-40B4-BE49-F238E27FC236}">
-                <a16:creationId xmlns:a16="http://schemas.microsoft.com/office/drawing/2014/main" id="{A50956FE-97FA-4074-A5DE-E4A125EBCE84}"/>
+                <a16:creationId xmlns:a16="http://schemas.microsoft.com/office/drawing/2014/main" id="{F20FA3BE-114F-40AE-801D-1B5B1F65D899}"/>
               </a:ext>
             </a:extLst>
           </p:cNvPr>
@@ -4642,7 +4642,7 @@
           <p:cNvPr id="7" name="">
             <a:extLst xmlns:a="http://schemas.openxmlformats.org/drawingml/2006/main">
               <a:ext uri="{FF2B5EF4-FFF2-40B4-BE49-F238E27FC236}">
-                <a16:creationId xmlns:a16="http://schemas.microsoft.com/office/drawing/2014/main" id="{FEF6E845-E08F-4CCE-A94E-136EC6AAF05D}"/>
+                <a16:creationId xmlns:a16="http://schemas.microsoft.com/office/drawing/2014/main" id="{D885010D-DA44-4F92-902D-B639F506EE0D}"/>
               </a:ext>
             </a:extLst>
           </p:cNvPr>
@@ -4674,7 +4674,7 @@
           <p:cNvPr id="8" name="">
             <a:extLst xmlns:a="http://schemas.openxmlformats.org/drawingml/2006/main">
               <a:ext uri="{FF2B5EF4-FFF2-40B4-BE49-F238E27FC236}">
-                <a16:creationId xmlns:a16="http://schemas.microsoft.com/office/drawing/2014/main" id="{62C638C9-E197-4098-A23F-C3E5212CDB73}"/>
+                <a16:creationId xmlns:a16="http://schemas.microsoft.com/office/drawing/2014/main" id="{EE3F3947-D7DE-4012-ADE6-AE513247E91A}"/>
               </a:ext>
             </a:extLst>
           </p:cNvPr>
@@ -4731,7 +4731,7 @@
           <p:cNvPr id="9" name="">
             <a:extLst xmlns:a="http://schemas.openxmlformats.org/drawingml/2006/main">
               <a:ext uri="{FF2B5EF4-FFF2-40B4-BE49-F238E27FC236}">
-                <a16:creationId xmlns:a16="http://schemas.microsoft.com/office/drawing/2014/main" id="{9E322610-68EE-4CAF-9AF7-45A7EE7D9A82}"/>
+                <a16:creationId xmlns:a16="http://schemas.microsoft.com/office/drawing/2014/main" id="{D2B5FA84-E295-4207-A87E-7037A455D288}"/>
               </a:ext>
             </a:extLst>
           </p:cNvPr>
@@ -4788,7 +4788,7 @@
           <p:cNvPr id="10" name="">
             <a:extLst xmlns:a="http://schemas.openxmlformats.org/drawingml/2006/main">
               <a:ext uri="{FF2B5EF4-FFF2-40B4-BE49-F238E27FC236}">
-                <a16:creationId xmlns:a16="http://schemas.microsoft.com/office/drawing/2014/main" id="{01883AFC-0BEF-4F98-9B05-9743E242A095}"/>
+                <a16:creationId xmlns:a16="http://schemas.microsoft.com/office/drawing/2014/main" id="{949945C8-87EE-4D03-928B-9FD65E362870}"/>
               </a:ext>
             </a:extLst>
           </p:cNvPr>
@@ -4822,7 +4822,7 @@
           <p:cNvPr id="11" name="">
             <a:extLst xmlns:a="http://schemas.openxmlformats.org/drawingml/2006/main">
               <a:ext uri="{FF2B5EF4-FFF2-40B4-BE49-F238E27FC236}">
-                <a16:creationId xmlns:a16="http://schemas.microsoft.com/office/drawing/2014/main" id="{CBC9D7DF-FC3E-4228-91FE-0741C609FA17}"/>
+                <a16:creationId xmlns:a16="http://schemas.microsoft.com/office/drawing/2014/main" id="{3925B3E6-CBAF-449B-B94D-19EB5B5F4225}"/>
               </a:ext>
             </a:extLst>
           </p:cNvPr>
@@ -4854,7 +4854,7 @@
           <p:cNvPr id="12" name="">
             <a:extLst xmlns:a="http://schemas.openxmlformats.org/drawingml/2006/main">
               <a:ext uri="{FF2B5EF4-FFF2-40B4-BE49-F238E27FC236}">
-                <a16:creationId xmlns:a16="http://schemas.microsoft.com/office/drawing/2014/main" id="{065586FD-AD78-4C23-B4DD-6DBEAB3C09A5}"/>
+                <a16:creationId xmlns:a16="http://schemas.microsoft.com/office/drawing/2014/main" id="{AE3ED29C-AC2D-42FD-AC3F-6E2C5E81A7C5}"/>
               </a:ext>
             </a:extLst>
           </p:cNvPr>
@@ -4911,7 +4911,7 @@
           <p:cNvPr id="13" name="">
             <a:extLst xmlns:a="http://schemas.openxmlformats.org/drawingml/2006/main">
               <a:ext uri="{FF2B5EF4-FFF2-40B4-BE49-F238E27FC236}">
-                <a16:creationId xmlns:a16="http://schemas.microsoft.com/office/drawing/2014/main" id="{964C3C90-208D-4788-9901-3217B9423C79}"/>
+                <a16:creationId xmlns:a16="http://schemas.microsoft.com/office/drawing/2014/main" id="{459A173F-7969-405B-8B19-7DEDD788D1E5}"/>
               </a:ext>
             </a:extLst>
           </p:cNvPr>
@@ -4968,7 +4968,7 @@
           <p:cNvPr id="14" name="">
             <a:extLst xmlns:a="http://schemas.openxmlformats.org/drawingml/2006/main">
               <a:ext uri="{FF2B5EF4-FFF2-40B4-BE49-F238E27FC236}">
-                <a16:creationId xmlns:a16="http://schemas.microsoft.com/office/drawing/2014/main" id="{7E47B063-2A3A-41CF-9EB6-25DF7B1E87E2}"/>
+                <a16:creationId xmlns:a16="http://schemas.microsoft.com/office/drawing/2014/main" id="{57EDCF9A-47EF-40C8-972D-85DCC48444B2}"/>
               </a:ext>
             </a:extLst>
           </p:cNvPr>
@@ -5002,7 +5002,7 @@
           <p:cNvPr id="15" name="">
             <a:extLst xmlns:a="http://schemas.openxmlformats.org/drawingml/2006/main">
               <a:ext uri="{FF2B5EF4-FFF2-40B4-BE49-F238E27FC236}">
-                <a16:creationId xmlns:a16="http://schemas.microsoft.com/office/drawing/2014/main" id="{BA30DCA9-3CE7-4C9A-A98B-1379856B0A8A}"/>
+                <a16:creationId xmlns:a16="http://schemas.microsoft.com/office/drawing/2014/main" id="{5CA87749-6ECE-4155-8686-89F9F6DBF29A}"/>
               </a:ext>
             </a:extLst>
           </p:cNvPr>
@@ -5034,7 +5034,7 @@
           <p:cNvPr id="16" name="">
             <a:extLst xmlns:a="http://schemas.openxmlformats.org/drawingml/2006/main">
               <a:ext uri="{FF2B5EF4-FFF2-40B4-BE49-F238E27FC236}">
-                <a16:creationId xmlns:a16="http://schemas.microsoft.com/office/drawing/2014/main" id="{56661934-84F1-4C1E-9AEE-F0F5D360B57A}"/>
+                <a16:creationId xmlns:a16="http://schemas.microsoft.com/office/drawing/2014/main" id="{98E568E5-56F7-4059-9168-2C426C2CD48B}"/>
               </a:ext>
             </a:extLst>
           </p:cNvPr>
@@ -5091,7 +5091,7 @@
           <p:cNvPr id="17" name="">
             <a:extLst xmlns:a="http://schemas.openxmlformats.org/drawingml/2006/main">
               <a:ext uri="{FF2B5EF4-FFF2-40B4-BE49-F238E27FC236}">
-                <a16:creationId xmlns:a16="http://schemas.microsoft.com/office/drawing/2014/main" id="{23F26B60-FF23-40CD-AC5C-40C91BD17917}"/>
+                <a16:creationId xmlns:a16="http://schemas.microsoft.com/office/drawing/2014/main" id="{00D83DA2-0C55-437A-8044-12D97A9AE19B}"/>
               </a:ext>
             </a:extLst>
           </p:cNvPr>
@@ -5148,7 +5148,7 @@
           <p:cNvPr id="18" name="">
             <a:extLst xmlns:a="http://schemas.openxmlformats.org/drawingml/2006/main">
               <a:ext uri="{FF2B5EF4-FFF2-40B4-BE49-F238E27FC236}">
-                <a16:creationId xmlns:a16="http://schemas.microsoft.com/office/drawing/2014/main" id="{4267AAAF-8040-4FB3-A4E7-E241B95F0621}"/>
+                <a16:creationId xmlns:a16="http://schemas.microsoft.com/office/drawing/2014/main" id="{735574B5-043E-44AA-83C8-945380CD0C40}"/>
               </a:ext>
             </a:extLst>
           </p:cNvPr>
@@ -5182,7 +5182,7 @@
           <p:cNvPr id="19" name="">
             <a:extLst xmlns:a="http://schemas.openxmlformats.org/drawingml/2006/main">
               <a:ext uri="{FF2B5EF4-FFF2-40B4-BE49-F238E27FC236}">
-                <a16:creationId xmlns:a16="http://schemas.microsoft.com/office/drawing/2014/main" id="{7E392943-3EA9-4463-A968-343B4CA8A1D6}"/>
+                <a16:creationId xmlns:a16="http://schemas.microsoft.com/office/drawing/2014/main" id="{B76CCB10-31A4-439F-9512-E5493F29FA1F}"/>
               </a:ext>
             </a:extLst>
           </p:cNvPr>
@@ -5214,7 +5214,7 @@
           <p:cNvPr id="20" name="">
             <a:extLst xmlns:a="http://schemas.openxmlformats.org/drawingml/2006/main">
               <a:ext uri="{FF2B5EF4-FFF2-40B4-BE49-F238E27FC236}">
-                <a16:creationId xmlns:a16="http://schemas.microsoft.com/office/drawing/2014/main" id="{4DBB8D53-E1A7-4583-9318-4488E954B672}"/>
+                <a16:creationId xmlns:a16="http://schemas.microsoft.com/office/drawing/2014/main" id="{94BCB8D5-3859-4CD7-AA4F-EDF6A31C5AAA}"/>
               </a:ext>
             </a:extLst>
           </p:cNvPr>
@@ -5271,7 +5271,7 @@
           <p:cNvPr id="21" name="">
             <a:extLst xmlns:a="http://schemas.openxmlformats.org/drawingml/2006/main">
               <a:ext uri="{FF2B5EF4-FFF2-40B4-BE49-F238E27FC236}">
-                <a16:creationId xmlns:a16="http://schemas.microsoft.com/office/drawing/2014/main" id="{F5A6B2A3-84E8-42DB-BE0D-BCE2CA0A2147}"/>
+                <a16:creationId xmlns:a16="http://schemas.microsoft.com/office/drawing/2014/main" id="{99B7F7C8-886C-4730-BA78-5C89A822B97E}"/>
               </a:ext>
             </a:extLst>
           </p:cNvPr>
@@ -5328,7 +5328,7 @@
           <p:cNvPr id="22" name="">
             <a:extLst xmlns:a="http://schemas.openxmlformats.org/drawingml/2006/main">
               <a:ext uri="{FF2B5EF4-FFF2-40B4-BE49-F238E27FC236}">
-                <a16:creationId xmlns:a16="http://schemas.microsoft.com/office/drawing/2014/main" id="{C54F8EC8-71BF-40EA-B99B-B3FF989985E5}"/>
+                <a16:creationId xmlns:a16="http://schemas.microsoft.com/office/drawing/2014/main" id="{A1F60374-8446-4BCF-BFD9-90D2412FD6E8}"/>
               </a:ext>
             </a:extLst>
           </p:cNvPr>
@@ -5383,7 +5383,7 @@
     </p:spTree>
     <p:extLst>
       <p:ext uri="{BB962C8B-B14F-4D97-AF65-F5344CB8AC3E}">
-        <p14:creationId xmlns:p14="http://schemas.microsoft.com/office/powerpoint/2010/main" val="1892434725"/>
+        <p14:creationId xmlns:p14="http://schemas.microsoft.com/office/powerpoint/2010/main" val="488331282"/>
       </p:ext>
     </p:extLst>
   </p:cSld>
@@ -5584,7 +5584,7 @@
           <p:cNvPr id="23" name="">
             <a:extLst xmlns:a="http://schemas.openxmlformats.org/drawingml/2006/main">
               <a:ext uri="{FF2B5EF4-FFF2-40B4-BE49-F238E27FC236}">
-                <a16:creationId xmlns:a16="http://schemas.microsoft.com/office/drawing/2014/main" id="{9F1A7592-AE3B-4B34-9E5D-F61F4CA1B2D1}"/>
+                <a16:creationId xmlns:a16="http://schemas.microsoft.com/office/drawing/2014/main" id="{16B4F957-9E98-4627-A604-D151FC23801A}"/>
               </a:ext>
             </a:extLst>
           </p:cNvPr>
@@ -5616,7 +5616,7 @@
           <p:cNvPr id="2" name="">
             <a:extLst xmlns:a="http://schemas.openxmlformats.org/drawingml/2006/main">
               <a:ext uri="{FF2B5EF4-FFF2-40B4-BE49-F238E27FC236}">
-                <a16:creationId xmlns:a16="http://schemas.microsoft.com/office/drawing/2014/main" id="{816E37AD-DB93-4EC1-BD31-C6CBFF8E9B5A}"/>
+                <a16:creationId xmlns:a16="http://schemas.microsoft.com/office/drawing/2014/main" id="{8B3E9311-D849-4B5E-8C22-F91280335883}"/>
               </a:ext>
             </a:extLst>
           </p:cNvPr>
@@ -5673,7 +5673,7 @@
           <p:cNvPr id="3" name="">
             <a:extLst xmlns:a="http://schemas.openxmlformats.org/drawingml/2006/main">
               <a:ext uri="{FF2B5EF4-FFF2-40B4-BE49-F238E27FC236}">
-                <a16:creationId xmlns:a16="http://schemas.microsoft.com/office/drawing/2014/main" id="{CCCD047E-3442-4F19-904B-CC72D97885DE}"/>
+                <a16:creationId xmlns:a16="http://schemas.microsoft.com/office/drawing/2014/main" id="{51C44202-395C-47E4-B016-C55A147BF9AE}"/>
               </a:ext>
             </a:extLst>
           </p:cNvPr>
@@ -5705,7 +5705,7 @@
           <p:cNvPr id="4" name="">
             <a:extLst xmlns:a="http://schemas.openxmlformats.org/drawingml/2006/main">
               <a:ext uri="{FF2B5EF4-FFF2-40B4-BE49-F238E27FC236}">
-                <a16:creationId xmlns:a16="http://schemas.microsoft.com/office/drawing/2014/main" id="{92D6EE9D-F4CC-4F3D-AAAE-BCD1667B5FD0}"/>
+                <a16:creationId xmlns:a16="http://schemas.microsoft.com/office/drawing/2014/main" id="{B962EBD1-917D-44CD-A956-4CAA945B9B46}"/>
               </a:ext>
             </a:extLst>
           </p:cNvPr>
@@ -5762,7 +5762,7 @@
           <p:cNvPr id="5" name="">
             <a:extLst xmlns:a="http://schemas.openxmlformats.org/drawingml/2006/main">
               <a:ext uri="{FF2B5EF4-FFF2-40B4-BE49-F238E27FC236}">
-                <a16:creationId xmlns:a16="http://schemas.microsoft.com/office/drawing/2014/main" id="{B40BF6C0-9957-41CD-8A64-F25AF163513B}"/>
+                <a16:creationId xmlns:a16="http://schemas.microsoft.com/office/drawing/2014/main" id="{13BF3B1B-FD49-4E56-87F7-7DBC3FBA198C}"/>
               </a:ext>
             </a:extLst>
           </p:cNvPr>
@@ -5819,7 +5819,7 @@
           <p:cNvPr id="6" name="">
             <a:extLst xmlns:a="http://schemas.openxmlformats.org/drawingml/2006/main">
               <a:ext uri="{FF2B5EF4-FFF2-40B4-BE49-F238E27FC236}">
-                <a16:creationId xmlns:a16="http://schemas.microsoft.com/office/drawing/2014/main" id="{9E835C9E-A074-439C-A45A-AE3797E34DEE}"/>
+                <a16:creationId xmlns:a16="http://schemas.microsoft.com/office/drawing/2014/main" id="{F8F74D5B-20CA-4562-B86F-738AEA21A1BA}"/>
               </a:ext>
             </a:extLst>
           </p:cNvPr>
@@ -5876,7 +5876,7 @@
           <p:cNvPr id="7" name="">
             <a:extLst xmlns:a="http://schemas.openxmlformats.org/drawingml/2006/main">
               <a:ext uri="{FF2B5EF4-FFF2-40B4-BE49-F238E27FC236}">
-                <a16:creationId xmlns:a16="http://schemas.microsoft.com/office/drawing/2014/main" id="{884E8E55-D507-4F62-915E-20D4CA082229}"/>
+                <a16:creationId xmlns:a16="http://schemas.microsoft.com/office/drawing/2014/main" id="{35E57F8F-FCFE-4DD7-9C35-1C7BBEEB5CBF}"/>
               </a:ext>
             </a:extLst>
           </p:cNvPr>
@@ -5908,7 +5908,7 @@
           <p:cNvPr id="8" name="">
             <a:extLst xmlns:a="http://schemas.openxmlformats.org/drawingml/2006/main">
               <a:ext uri="{FF2B5EF4-FFF2-40B4-BE49-F238E27FC236}">
-                <a16:creationId xmlns:a16="http://schemas.microsoft.com/office/drawing/2014/main" id="{7015BBDF-3AF8-4EFD-A801-11B6D3290785}"/>
+                <a16:creationId xmlns:a16="http://schemas.microsoft.com/office/drawing/2014/main" id="{49FDD267-CAA3-4513-8C96-AB5FB946ADBA}"/>
               </a:ext>
             </a:extLst>
           </p:cNvPr>
@@ -5965,7 +5965,7 @@
           <p:cNvPr id="9" name="">
             <a:extLst xmlns:a="http://schemas.openxmlformats.org/drawingml/2006/main">
               <a:ext uri="{FF2B5EF4-FFF2-40B4-BE49-F238E27FC236}">
-                <a16:creationId xmlns:a16="http://schemas.microsoft.com/office/drawing/2014/main" id="{1D332710-BCD5-4A1C-ACFC-678487D72B8D}"/>
+                <a16:creationId xmlns:a16="http://schemas.microsoft.com/office/drawing/2014/main" id="{0F69BFEC-D79D-49B2-925B-EA682516EBF6}"/>
               </a:ext>
             </a:extLst>
           </p:cNvPr>
@@ -6022,7 +6022,7 @@
           <p:cNvPr id="10" name="">
             <a:extLst xmlns:a="http://schemas.openxmlformats.org/drawingml/2006/main">
               <a:ext uri="{FF2B5EF4-FFF2-40B4-BE49-F238E27FC236}">
-                <a16:creationId xmlns:a16="http://schemas.microsoft.com/office/drawing/2014/main" id="{248E50CD-919E-4873-870D-47114837B035}"/>
+                <a16:creationId xmlns:a16="http://schemas.microsoft.com/office/drawing/2014/main" id="{615132AC-5E76-4537-82B5-7EE7FBFFB956}"/>
               </a:ext>
             </a:extLst>
           </p:cNvPr>
@@ -6056,7 +6056,7 @@
           <p:cNvPr id="11" name="">
             <a:extLst xmlns:a="http://schemas.openxmlformats.org/drawingml/2006/main">
               <a:ext uri="{FF2B5EF4-FFF2-40B4-BE49-F238E27FC236}">
-                <a16:creationId xmlns:a16="http://schemas.microsoft.com/office/drawing/2014/main" id="{FCD22700-C7AC-4387-B3B5-547602DF8C6D}"/>
+                <a16:creationId xmlns:a16="http://schemas.microsoft.com/office/drawing/2014/main" id="{18BDCAEF-E855-45E1-8F27-E3F45A124BBD}"/>
               </a:ext>
             </a:extLst>
           </p:cNvPr>
@@ -6088,7 +6088,7 @@
           <p:cNvPr id="12" name="">
             <a:extLst xmlns:a="http://schemas.openxmlformats.org/drawingml/2006/main">
               <a:ext uri="{FF2B5EF4-FFF2-40B4-BE49-F238E27FC236}">
-                <a16:creationId xmlns:a16="http://schemas.microsoft.com/office/drawing/2014/main" id="{F0CC4E75-7938-4A1A-B4DD-F96701E4B456}"/>
+                <a16:creationId xmlns:a16="http://schemas.microsoft.com/office/drawing/2014/main" id="{28BEEBE1-D30B-4621-9777-EDB6BCE1EF2A}"/>
               </a:ext>
             </a:extLst>
           </p:cNvPr>
@@ -6145,7 +6145,7 @@
           <p:cNvPr id="13" name="">
             <a:extLst xmlns:a="http://schemas.openxmlformats.org/drawingml/2006/main">
               <a:ext uri="{FF2B5EF4-FFF2-40B4-BE49-F238E27FC236}">
-                <a16:creationId xmlns:a16="http://schemas.microsoft.com/office/drawing/2014/main" id="{29CA97CA-8A4F-4AC1-8814-1561A507E192}"/>
+                <a16:creationId xmlns:a16="http://schemas.microsoft.com/office/drawing/2014/main" id="{0A8AD61B-151A-481D-9D04-C8815C30223F}"/>
               </a:ext>
             </a:extLst>
           </p:cNvPr>
@@ -6202,7 +6202,7 @@
           <p:cNvPr id="14" name="">
             <a:extLst xmlns:a="http://schemas.openxmlformats.org/drawingml/2006/main">
               <a:ext uri="{FF2B5EF4-FFF2-40B4-BE49-F238E27FC236}">
-                <a16:creationId xmlns:a16="http://schemas.microsoft.com/office/drawing/2014/main" id="{AB01F355-0E26-480F-A05A-C0B67A7A0E6C}"/>
+                <a16:creationId xmlns:a16="http://schemas.microsoft.com/office/drawing/2014/main" id="{D8E31792-F706-4D17-8C4A-1B496A2E92C6}"/>
               </a:ext>
             </a:extLst>
           </p:cNvPr>
@@ -6236,7 +6236,7 @@
           <p:cNvPr id="15" name="">
             <a:extLst xmlns:a="http://schemas.openxmlformats.org/drawingml/2006/main">
               <a:ext uri="{FF2B5EF4-FFF2-40B4-BE49-F238E27FC236}">
-                <a16:creationId xmlns:a16="http://schemas.microsoft.com/office/drawing/2014/main" id="{28BB1486-6DB4-4081-88BE-E86AE6070B86}"/>
+                <a16:creationId xmlns:a16="http://schemas.microsoft.com/office/drawing/2014/main" id="{EADB212D-61CE-4C61-8711-80E7D4CDE8DF}"/>
               </a:ext>
             </a:extLst>
           </p:cNvPr>
@@ -6268,7 +6268,7 @@
           <p:cNvPr id="16" name="">
             <a:extLst xmlns:a="http://schemas.openxmlformats.org/drawingml/2006/main">
               <a:ext uri="{FF2B5EF4-FFF2-40B4-BE49-F238E27FC236}">
-                <a16:creationId xmlns:a16="http://schemas.microsoft.com/office/drawing/2014/main" id="{9400206D-A372-4D66-A9FB-B3F5CB51379D}"/>
+                <a16:creationId xmlns:a16="http://schemas.microsoft.com/office/drawing/2014/main" id="{C52749F1-E3E4-4E75-B0DD-198BE49CC7F0}"/>
               </a:ext>
             </a:extLst>
           </p:cNvPr>
@@ -6325,7 +6325,7 @@
           <p:cNvPr id="17" name="">
             <a:extLst xmlns:a="http://schemas.openxmlformats.org/drawingml/2006/main">
               <a:ext uri="{FF2B5EF4-FFF2-40B4-BE49-F238E27FC236}">
-                <a16:creationId xmlns:a16="http://schemas.microsoft.com/office/drawing/2014/main" id="{A483246B-55DD-4811-96A0-685E0EF38940}"/>
+                <a16:creationId xmlns:a16="http://schemas.microsoft.com/office/drawing/2014/main" id="{B5736D2E-4EEE-44CC-B1DC-3D65275C8E36}"/>
               </a:ext>
             </a:extLst>
           </p:cNvPr>
@@ -6382,7 +6382,7 @@
           <p:cNvPr id="18" name="">
             <a:extLst xmlns:a="http://schemas.openxmlformats.org/drawingml/2006/main">
               <a:ext uri="{FF2B5EF4-FFF2-40B4-BE49-F238E27FC236}">
-                <a16:creationId xmlns:a16="http://schemas.microsoft.com/office/drawing/2014/main" id="{C52C45F6-4AB6-462C-A826-869A4947F503}"/>
+                <a16:creationId xmlns:a16="http://schemas.microsoft.com/office/drawing/2014/main" id="{16E59A19-3F71-4DFA-9A2D-755055EFB288}"/>
               </a:ext>
             </a:extLst>
           </p:cNvPr>
@@ -6416,7 +6416,7 @@
           <p:cNvPr id="19" name="">
             <a:extLst xmlns:a="http://schemas.openxmlformats.org/drawingml/2006/main">
               <a:ext uri="{FF2B5EF4-FFF2-40B4-BE49-F238E27FC236}">
-                <a16:creationId xmlns:a16="http://schemas.microsoft.com/office/drawing/2014/main" id="{E060BB46-3A90-45E3-A33C-327F3C72B289}"/>
+                <a16:creationId xmlns:a16="http://schemas.microsoft.com/office/drawing/2014/main" id="{4702F59F-5A4B-4718-BC40-6473AEAC2B42}"/>
               </a:ext>
             </a:extLst>
           </p:cNvPr>
@@ -6448,7 +6448,7 @@
           <p:cNvPr id="20" name="">
             <a:extLst xmlns:a="http://schemas.openxmlformats.org/drawingml/2006/main">
               <a:ext uri="{FF2B5EF4-FFF2-40B4-BE49-F238E27FC236}">
-                <a16:creationId xmlns:a16="http://schemas.microsoft.com/office/drawing/2014/main" id="{5F4F21AE-E6A2-41F9-B069-6E6CB03D3906}"/>
+                <a16:creationId xmlns:a16="http://schemas.microsoft.com/office/drawing/2014/main" id="{C252D48C-B5D7-42D9-8BA4-6FE604BA470F}"/>
               </a:ext>
             </a:extLst>
           </p:cNvPr>
@@ -6505,7 +6505,7 @@
           <p:cNvPr id="21" name="">
             <a:extLst xmlns:a="http://schemas.openxmlformats.org/drawingml/2006/main">
               <a:ext uri="{FF2B5EF4-FFF2-40B4-BE49-F238E27FC236}">
-                <a16:creationId xmlns:a16="http://schemas.microsoft.com/office/drawing/2014/main" id="{8B7E12A9-CC5C-4B19-B505-4259E374939D}"/>
+                <a16:creationId xmlns:a16="http://schemas.microsoft.com/office/drawing/2014/main" id="{4A347F3D-E6E4-49FE-B396-C2FC519347DD}"/>
               </a:ext>
             </a:extLst>
           </p:cNvPr>
@@ -6562,7 +6562,7 @@
           <p:cNvPr id="22" name="">
             <a:extLst xmlns:a="http://schemas.openxmlformats.org/drawingml/2006/main">
               <a:ext uri="{FF2B5EF4-FFF2-40B4-BE49-F238E27FC236}">
-                <a16:creationId xmlns:a16="http://schemas.microsoft.com/office/drawing/2014/main" id="{08FA1449-29A2-484D-8FAD-F2E854C97D7D}"/>
+                <a16:creationId xmlns:a16="http://schemas.microsoft.com/office/drawing/2014/main" id="{7F933672-50F9-4898-B79C-D8C2A11E1169}"/>
               </a:ext>
             </a:extLst>
           </p:cNvPr>
@@ -6617,7 +6617,7 @@
     </p:spTree>
     <p:extLst>
       <p:ext uri="{BB962C8B-B14F-4D97-AF65-F5344CB8AC3E}">
-        <p14:creationId xmlns:p14="http://schemas.microsoft.com/office/powerpoint/2010/main" val="79700180"/>
+        <p14:creationId xmlns:p14="http://schemas.microsoft.com/office/powerpoint/2010/main" val="1804752387"/>
       </p:ext>
     </p:extLst>
   </p:cSld>
@@ -6818,7 +6818,7 @@
           <p:cNvPr id="16" name="">
             <a:extLst xmlns:a="http://schemas.openxmlformats.org/drawingml/2006/main">
               <a:ext uri="{FF2B5EF4-FFF2-40B4-BE49-F238E27FC236}">
-                <a16:creationId xmlns:a16="http://schemas.microsoft.com/office/drawing/2014/main" id="{65A01632-9C8A-4A6F-91AB-799EFFCB2C96}"/>
+                <a16:creationId xmlns:a16="http://schemas.microsoft.com/office/drawing/2014/main" id="{30A9624F-1B4F-411C-BED2-4F1030479883}"/>
               </a:ext>
             </a:extLst>
           </p:cNvPr>
@@ -6850,7 +6850,7 @@
           <p:cNvPr id="2" name="">
             <a:extLst xmlns:a="http://schemas.openxmlformats.org/drawingml/2006/main">
               <a:ext uri="{FF2B5EF4-FFF2-40B4-BE49-F238E27FC236}">
-                <a16:creationId xmlns:a16="http://schemas.microsoft.com/office/drawing/2014/main" id="{8379F27E-51E7-4BA3-A0E9-46ACCFA687DE}"/>
+                <a16:creationId xmlns:a16="http://schemas.microsoft.com/office/drawing/2014/main" id="{36FB3888-8187-46F7-ABA7-9D0D90A3368F}"/>
               </a:ext>
             </a:extLst>
           </p:cNvPr>
@@ -6907,7 +6907,7 @@
           <p:cNvPr id="3" name="">
             <a:extLst xmlns:a="http://schemas.openxmlformats.org/drawingml/2006/main">
               <a:ext uri="{FF2B5EF4-FFF2-40B4-BE49-F238E27FC236}">
-                <a16:creationId xmlns:a16="http://schemas.microsoft.com/office/drawing/2014/main" id="{0D949C5B-C376-436D-A6E3-0690345E7CDE}"/>
+                <a16:creationId xmlns:a16="http://schemas.microsoft.com/office/drawing/2014/main" id="{683115F2-9EFC-4E27-93B6-1A200CA6D71D}"/>
               </a:ext>
             </a:extLst>
           </p:cNvPr>
@@ -6939,7 +6939,7 @@
           <p:cNvPr id="4" name="">
             <a:extLst xmlns:a="http://schemas.openxmlformats.org/drawingml/2006/main">
               <a:ext uri="{FF2B5EF4-FFF2-40B4-BE49-F238E27FC236}">
-                <a16:creationId xmlns:a16="http://schemas.microsoft.com/office/drawing/2014/main" id="{A535AC94-FE5F-482F-904E-9DA0E3955C31}"/>
+                <a16:creationId xmlns:a16="http://schemas.microsoft.com/office/drawing/2014/main" id="{33C378E7-AB04-4CB7-BAF9-F0AF1B1101D4}"/>
               </a:ext>
             </a:extLst>
           </p:cNvPr>
@@ -6996,7 +6996,7 @@
           <p:cNvPr id="5" name="">
             <a:extLst xmlns:a="http://schemas.openxmlformats.org/drawingml/2006/main">
               <a:ext uri="{FF2B5EF4-FFF2-40B4-BE49-F238E27FC236}">
-                <a16:creationId xmlns:a16="http://schemas.microsoft.com/office/drawing/2014/main" id="{E347BD11-DBB2-4652-B1EC-5A5C219FFBB9}"/>
+                <a16:creationId xmlns:a16="http://schemas.microsoft.com/office/drawing/2014/main" id="{4AF5E692-2320-4036-867C-211B758849A1}"/>
               </a:ext>
             </a:extLst>
           </p:cNvPr>
@@ -7053,7 +7053,7 @@
           <p:cNvPr id="6" name="">
             <a:extLst xmlns:a="http://schemas.openxmlformats.org/drawingml/2006/main">
               <a:ext uri="{FF2B5EF4-FFF2-40B4-BE49-F238E27FC236}">
-                <a16:creationId xmlns:a16="http://schemas.microsoft.com/office/drawing/2014/main" id="{9B3341BD-65A9-4E68-93AF-817CA471C7A4}"/>
+                <a16:creationId xmlns:a16="http://schemas.microsoft.com/office/drawing/2014/main" id="{2872B604-F6FB-4BAB-836E-874BBAC16F0D}"/>
               </a:ext>
             </a:extLst>
           </p:cNvPr>
@@ -7110,7 +7110,7 @@
           <p:cNvPr id="7" name="">
             <a:extLst xmlns:a="http://schemas.openxmlformats.org/drawingml/2006/main">
               <a:ext uri="{FF2B5EF4-FFF2-40B4-BE49-F238E27FC236}">
-                <a16:creationId xmlns:a16="http://schemas.microsoft.com/office/drawing/2014/main" id="{EA7D5553-3913-4D12-ADCC-61B868E9AB99}"/>
+                <a16:creationId xmlns:a16="http://schemas.microsoft.com/office/drawing/2014/main" id="{052033E3-4FD3-4A75-8689-305721ADEFAB}"/>
               </a:ext>
             </a:extLst>
           </p:cNvPr>
@@ -7142,7 +7142,7 @@
           <p:cNvPr id="8" name="">
             <a:extLst xmlns:a="http://schemas.openxmlformats.org/drawingml/2006/main">
               <a:ext uri="{FF2B5EF4-FFF2-40B4-BE49-F238E27FC236}">
-                <a16:creationId xmlns:a16="http://schemas.microsoft.com/office/drawing/2014/main" id="{A381F811-716E-49ED-903F-21AF4413D75E}"/>
+                <a16:creationId xmlns:a16="http://schemas.microsoft.com/office/drawing/2014/main" id="{80D082D2-ED9E-4C1E-BEC9-AA09725C3C69}"/>
               </a:ext>
             </a:extLst>
           </p:cNvPr>
@@ -7199,7 +7199,7 @@
           <p:cNvPr id="9" name="">
             <a:extLst xmlns:a="http://schemas.openxmlformats.org/drawingml/2006/main">
               <a:ext uri="{FF2B5EF4-FFF2-40B4-BE49-F238E27FC236}">
-                <a16:creationId xmlns:a16="http://schemas.microsoft.com/office/drawing/2014/main" id="{879EBED8-B307-47C9-BCE3-5CE648C54258}"/>
+                <a16:creationId xmlns:a16="http://schemas.microsoft.com/office/drawing/2014/main" id="{99355D21-F3C7-421F-85FE-5562A757A8F8}"/>
               </a:ext>
             </a:extLst>
           </p:cNvPr>
@@ -7256,7 +7256,7 @@
           <p:cNvPr id="10" name="">
             <a:extLst xmlns:a="http://schemas.openxmlformats.org/drawingml/2006/main">
               <a:ext uri="{FF2B5EF4-FFF2-40B4-BE49-F238E27FC236}">
-                <a16:creationId xmlns:a16="http://schemas.microsoft.com/office/drawing/2014/main" id="{D7FA7DE5-1DE1-4504-AAA2-51E2887A4A61}"/>
+                <a16:creationId xmlns:a16="http://schemas.microsoft.com/office/drawing/2014/main" id="{5AA37BCA-5527-47B4-8408-8E22F90EF196}"/>
               </a:ext>
             </a:extLst>
           </p:cNvPr>
@@ -7313,7 +7313,7 @@
           <p:cNvPr id="11" name="">
             <a:extLst xmlns:a="http://schemas.openxmlformats.org/drawingml/2006/main">
               <a:ext uri="{FF2B5EF4-FFF2-40B4-BE49-F238E27FC236}">
-                <a16:creationId xmlns:a16="http://schemas.microsoft.com/office/drawing/2014/main" id="{C9F0E529-61C6-47A3-A591-98684245A29C}"/>
+                <a16:creationId xmlns:a16="http://schemas.microsoft.com/office/drawing/2014/main" id="{0D06FA1B-AC4F-4A5F-8606-49674EA6BF1F}"/>
               </a:ext>
             </a:extLst>
           </p:cNvPr>
@@ -7345,7 +7345,7 @@
           <p:cNvPr id="12" name="">
             <a:extLst xmlns:a="http://schemas.openxmlformats.org/drawingml/2006/main">
               <a:ext uri="{FF2B5EF4-FFF2-40B4-BE49-F238E27FC236}">
-                <a16:creationId xmlns:a16="http://schemas.microsoft.com/office/drawing/2014/main" id="{0BF10810-D97C-4707-BB2B-4762E148BD5B}"/>
+                <a16:creationId xmlns:a16="http://schemas.microsoft.com/office/drawing/2014/main" id="{2DBC4F20-B854-4DE5-978C-49AB0DC3E0B9}"/>
               </a:ext>
             </a:extLst>
           </p:cNvPr>
@@ -7402,7 +7402,7 @@
           <p:cNvPr id="13" name="">
             <a:extLst xmlns:a="http://schemas.openxmlformats.org/drawingml/2006/main">
               <a:ext uri="{FF2B5EF4-FFF2-40B4-BE49-F238E27FC236}">
-                <a16:creationId xmlns:a16="http://schemas.microsoft.com/office/drawing/2014/main" id="{EFA5866D-0F0C-4DBB-91D3-6A08290C5599}"/>
+                <a16:creationId xmlns:a16="http://schemas.microsoft.com/office/drawing/2014/main" id="{E9739758-0F1E-4D19-9AF7-6CAE14309537}"/>
               </a:ext>
             </a:extLst>
           </p:cNvPr>
@@ -7459,7 +7459,7 @@
           <p:cNvPr id="14" name="">
             <a:extLst xmlns:a="http://schemas.openxmlformats.org/drawingml/2006/main">
               <a:ext uri="{FF2B5EF4-FFF2-40B4-BE49-F238E27FC236}">
-                <a16:creationId xmlns:a16="http://schemas.microsoft.com/office/drawing/2014/main" id="{9F60ED45-BEFD-4252-BB2F-29A8947C76F9}"/>
+                <a16:creationId xmlns:a16="http://schemas.microsoft.com/office/drawing/2014/main" id="{6B3B0B36-6241-4546-AA71-3B01ECAEFC34}"/>
               </a:ext>
             </a:extLst>
           </p:cNvPr>
@@ -7516,7 +7516,7 @@
           <p:cNvPr id="15" name="">
             <a:extLst xmlns:a="http://schemas.openxmlformats.org/drawingml/2006/main">
               <a:ext uri="{FF2B5EF4-FFF2-40B4-BE49-F238E27FC236}">
-                <a16:creationId xmlns:a16="http://schemas.microsoft.com/office/drawing/2014/main" id="{06D5EEAF-3ACD-4DF6-B4A0-2F578FEEFC5E}"/>
+                <a16:creationId xmlns:a16="http://schemas.microsoft.com/office/drawing/2014/main" id="{AB517AE1-581B-4935-9C64-368DC7A647CA}"/>
               </a:ext>
             </a:extLst>
           </p:cNvPr>
@@ -7571,7 +7571,7 @@
     </p:spTree>
     <p:extLst>
       <p:ext uri="{BB962C8B-B14F-4D97-AF65-F5344CB8AC3E}">
-        <p14:creationId xmlns:p14="http://schemas.microsoft.com/office/powerpoint/2010/main" val="119561603"/>
+        <p14:creationId xmlns:p14="http://schemas.microsoft.com/office/powerpoint/2010/main" val="1415771599"/>
       </p:ext>
     </p:extLst>
   </p:cSld>
@@ -7769,10 +7769,10 @@
       </p:grpSpPr>
       <p:sp>
         <p:nvSpPr>
-          <p:cNvPr id="27" name="">
-            <a:extLst xmlns:a="http://schemas.openxmlformats.org/drawingml/2006/main">
-              <a:ext uri="{FF2B5EF4-FFF2-40B4-BE49-F238E27FC236}">
-                <a16:creationId xmlns:a16="http://schemas.microsoft.com/office/drawing/2014/main" id="{F3751EBA-080C-4656-B319-F2543BB2D64F}"/>
+          <p:cNvPr id="26" name="">
+            <a:extLst xmlns:a="http://schemas.openxmlformats.org/drawingml/2006/main">
+              <a:ext uri="{FF2B5EF4-FFF2-40B4-BE49-F238E27FC236}">
+                <a16:creationId xmlns:a16="http://schemas.microsoft.com/office/drawing/2014/main" id="{CDE4C3FA-AF77-412C-B4E5-81E01C0FC1A0}"/>
               </a:ext>
             </a:extLst>
           </p:cNvPr>
@@ -7804,7 +7804,7 @@
           <p:cNvPr id="2" name="">
             <a:extLst xmlns:a="http://schemas.openxmlformats.org/drawingml/2006/main">
               <a:ext uri="{FF2B5EF4-FFF2-40B4-BE49-F238E27FC236}">
-                <a16:creationId xmlns:a16="http://schemas.microsoft.com/office/drawing/2014/main" id="{91A82153-E73D-4CBE-944D-CD5AC38C97AC}"/>
+                <a16:creationId xmlns:a16="http://schemas.microsoft.com/office/drawing/2014/main" id="{101DD10C-4A98-4711-8F2C-590E1D2E1D13}"/>
               </a:ext>
             </a:extLst>
           </p:cNvPr>
@@ -7861,7 +7861,7 @@
           <p:cNvPr id="3" name="">
             <a:extLst xmlns:a="http://schemas.openxmlformats.org/drawingml/2006/main">
               <a:ext uri="{FF2B5EF4-FFF2-40B4-BE49-F238E27FC236}">
-                <a16:creationId xmlns:a16="http://schemas.microsoft.com/office/drawing/2014/main" id="{A17FE11A-C667-42F5-95C3-CE01EBEB5164}"/>
+                <a16:creationId xmlns:a16="http://schemas.microsoft.com/office/drawing/2014/main" id="{88BC2639-0E51-4661-8F8D-209C923FB6B1}"/>
               </a:ext>
             </a:extLst>
           </p:cNvPr>
@@ -7893,7 +7893,7 @@
           <p:cNvPr id="4" name="">
             <a:extLst xmlns:a="http://schemas.openxmlformats.org/drawingml/2006/main">
               <a:ext uri="{FF2B5EF4-FFF2-40B4-BE49-F238E27FC236}">
-                <a16:creationId xmlns:a16="http://schemas.microsoft.com/office/drawing/2014/main" id="{DAB2802E-4AE9-45F9-8A55-85A7EF04B178}"/>
+                <a16:creationId xmlns:a16="http://schemas.microsoft.com/office/drawing/2014/main" id="{46121750-F42F-4E10-A9E0-792CB7A5B17E}"/>
               </a:ext>
             </a:extLst>
           </p:cNvPr>
@@ -7950,7 +7950,7 @@
           <p:cNvPr id="5" name="">
             <a:extLst xmlns:a="http://schemas.openxmlformats.org/drawingml/2006/main">
               <a:ext uri="{FF2B5EF4-FFF2-40B4-BE49-F238E27FC236}">
-                <a16:creationId xmlns:a16="http://schemas.microsoft.com/office/drawing/2014/main" id="{42751DAB-3370-4853-94C7-78903FC704B2}"/>
+                <a16:creationId xmlns:a16="http://schemas.microsoft.com/office/drawing/2014/main" id="{D8418AD4-8FCC-4CD5-A24B-5533DEE4BD91}"/>
               </a:ext>
             </a:extLst>
           </p:cNvPr>
@@ -8007,7 +8007,7 @@
           <p:cNvPr id="6" name="">
             <a:extLst xmlns:a="http://schemas.openxmlformats.org/drawingml/2006/main">
               <a:ext uri="{FF2B5EF4-FFF2-40B4-BE49-F238E27FC236}">
-                <a16:creationId xmlns:a16="http://schemas.microsoft.com/office/drawing/2014/main" id="{49EC8756-8098-4694-85A4-3DFFE3604DE4}"/>
+                <a16:creationId xmlns:a16="http://schemas.microsoft.com/office/drawing/2014/main" id="{7D2AABC4-0B16-49A7-ADF3-27F64A9A91CA}"/>
               </a:ext>
             </a:extLst>
           </p:cNvPr>
@@ -8064,7 +8064,7 @@
           <p:cNvPr id="7" name="">
             <a:extLst xmlns:a="http://schemas.openxmlformats.org/drawingml/2006/main">
               <a:ext uri="{FF2B5EF4-FFF2-40B4-BE49-F238E27FC236}">
-                <a16:creationId xmlns:a16="http://schemas.microsoft.com/office/drawing/2014/main" id="{95E549E4-8242-437D-A67A-D6A79AE1A05C}"/>
+                <a16:creationId xmlns:a16="http://schemas.microsoft.com/office/drawing/2014/main" id="{1CAB6C65-B891-4982-8E3E-7A8BADC13184}"/>
               </a:ext>
             </a:extLst>
           </p:cNvPr>
@@ -8096,7 +8096,7 @@
           <p:cNvPr id="8" name="">
             <a:extLst xmlns:a="http://schemas.openxmlformats.org/drawingml/2006/main">
               <a:ext uri="{FF2B5EF4-FFF2-40B4-BE49-F238E27FC236}">
-                <a16:creationId xmlns:a16="http://schemas.microsoft.com/office/drawing/2014/main" id="{0F19891C-0433-4E8A-9C9A-739D196776C4}"/>
+                <a16:creationId xmlns:a16="http://schemas.microsoft.com/office/drawing/2014/main" id="{9B5EB9CB-0C3F-4594-9AEF-27E4E8AF3C90}"/>
               </a:ext>
             </a:extLst>
           </p:cNvPr>
@@ -8153,7 +8153,7 @@
           <p:cNvPr id="9" name="">
             <a:extLst xmlns:a="http://schemas.openxmlformats.org/drawingml/2006/main">
               <a:ext uri="{FF2B5EF4-FFF2-40B4-BE49-F238E27FC236}">
-                <a16:creationId xmlns:a16="http://schemas.microsoft.com/office/drawing/2014/main" id="{66F3910D-6611-4F45-B028-6DCAA6183A96}"/>
+                <a16:creationId xmlns:a16="http://schemas.microsoft.com/office/drawing/2014/main" id="{1DDBB136-DB49-418F-A1BF-525B3103392C}"/>
               </a:ext>
             </a:extLst>
           </p:cNvPr>
@@ -8210,19 +8210,19 @@
           <p:cNvPr id="10" name="">
             <a:extLst xmlns:a="http://schemas.openxmlformats.org/drawingml/2006/main">
               <a:ext uri="{FF2B5EF4-FFF2-40B4-BE49-F238E27FC236}">
-                <a16:creationId xmlns:a16="http://schemas.microsoft.com/office/drawing/2014/main" id="{0A51E92C-A92E-4BB8-95BD-C22A0776FDEA}"/>
-              </a:ext>
-            </a:extLst>
-          </p:cNvPr>
-          <p:cNvSpPr>
-            <a:spLocks xmlns:a="http://schemas.openxmlformats.org/drawingml/2006/main" noGrp="1"/>
-          </p:cNvSpPr>
-          <p:nvPr/>
-        </p:nvSpPr>
-        <p:spPr>
-          <a:xfrm xmlns:a="http://schemas.openxmlformats.org/drawingml/2006/main">
-            <a:off x="914400" y="1257300"/>
-            <a:ext cx="10363200" cy="781050"/>
+                <a16:creationId xmlns:a16="http://schemas.microsoft.com/office/drawing/2014/main" id="{2892A6B1-BFED-48C4-82F1-261FEEB2C155}"/>
+              </a:ext>
+            </a:extLst>
+          </p:cNvPr>
+          <p:cNvSpPr>
+            <a:spLocks xmlns:a="http://schemas.openxmlformats.org/drawingml/2006/main" noGrp="1"/>
+          </p:cNvSpPr>
+          <p:nvPr/>
+        </p:nvSpPr>
+        <p:spPr>
+          <a:xfrm xmlns:a="http://schemas.openxmlformats.org/drawingml/2006/main">
+            <a:off x="857250" y="1219200"/>
+            <a:ext cx="10477500" cy="742950"/>
           </a:xfrm>
           <a:prstGeom xmlns:a="http://schemas.openxmlformats.org/drawingml/2006/main" prst="rect">
             <a:avLst/>
@@ -8239,7 +8239,7 @@
           <a:lstStyle xmlns:a="http://schemas.openxmlformats.org/drawingml/2006/main"/>
           <a:p xmlns:a="http://schemas.openxmlformats.org/drawingml/2006/main">
             <a:pPr algn="ctr">
-              <a:defRPr sz="2175" b="1">
+              <a:defRPr sz="2100" b="1">
                 <a:solidFill>
                   <a:srgbClr val="17253A"/>
                 </a:solidFill>
@@ -8249,7 +8249,7 @@
               </a:defRPr>
             </a:pPr>
             <a:r>
-              <a:rPr sz="2175" b="1">
+              <a:rPr sz="2100" b="1">
                 <a:solidFill>
                   <a:srgbClr val="17253A"/>
                 </a:solidFill>
@@ -8267,29 +8267,173 @@
           <p:cNvPr id="11" name="">
             <a:extLst xmlns:a="http://schemas.openxmlformats.org/drawingml/2006/main">
               <a:ext uri="{FF2B5EF4-FFF2-40B4-BE49-F238E27FC236}">
-                <a16:creationId xmlns:a16="http://schemas.microsoft.com/office/drawing/2014/main" id="{0F3243D0-730C-4D2C-ADEF-A505B05E4309}"/>
-              </a:ext>
-            </a:extLst>
-          </p:cNvPr>
-          <p:cNvSpPr>
-            <a:spLocks xmlns:a="http://schemas.openxmlformats.org/drawingml/2006/main" noGrp="1"/>
-          </p:cNvSpPr>
-          <p:nvPr/>
-        </p:nvSpPr>
-        <p:spPr>
-          <a:xfrm xmlns:a="http://schemas.openxmlformats.org/drawingml/2006/main">
-            <a:off x="781050" y="2171700"/>
-            <a:ext cx="10629900" cy="609600"/>
-          </a:xfrm>
-          <a:prstGeom xmlns:a="http://schemas.openxmlformats.org/drawingml/2006/main" prst="roundRect">
-            <a:avLst>
-              <a:gd name="adj" fmla="val 12500"/>
-            </a:avLst>
+                <a16:creationId xmlns:a16="http://schemas.microsoft.com/office/drawing/2014/main" id="{97C74DAC-931F-4A9B-B9EA-938E844A6AAF}"/>
+              </a:ext>
+            </a:extLst>
+          </p:cNvPr>
+          <p:cNvSpPr>
+            <a:spLocks xmlns:a="http://schemas.openxmlformats.org/drawingml/2006/main" noGrp="1"/>
+          </p:cNvSpPr>
+          <p:nvPr/>
+        </p:nvSpPr>
+        <p:spPr>
+          <a:xfrm xmlns:a="http://schemas.openxmlformats.org/drawingml/2006/main">
+            <a:off x="971550" y="2124075"/>
+            <a:ext cx="38100" cy="3524250"/>
+          </a:xfrm>
+          <a:prstGeom xmlns:a="http://schemas.openxmlformats.org/drawingml/2006/main" prst="rect">
+            <a:avLst/>
           </a:prstGeom>
           <a:solidFill xmlns:a="http://schemas.openxmlformats.org/drawingml/2006/main">
-            <a:srgbClr val="E7F1F1"/>
+            <a:srgbClr val="2C6E73"/>
           </a:solidFill>
-          <a:ln xmlns:a="http://schemas.openxmlformats.org/drawingml/2006/main" w="11430">
+          <a:ln xmlns:a="http://schemas.openxmlformats.org/drawingml/2006/main" w="0">
+            <a:solidFill>
+              <a:srgbClr val="2C6E73"/>
+            </a:solidFill>
+          </a:ln>
+        </p:spPr>
+      </p:sp>
+      <p:sp>
+        <p:nvSpPr>
+          <p:cNvPr id="12" name="">
+            <a:extLst xmlns:a="http://schemas.openxmlformats.org/drawingml/2006/main">
+              <a:ext uri="{FF2B5EF4-FFF2-40B4-BE49-F238E27FC236}">
+                <a16:creationId xmlns:a16="http://schemas.microsoft.com/office/drawing/2014/main" id="{C768B425-CAB1-4ABE-814B-8318E5E16D72}"/>
+              </a:ext>
+            </a:extLst>
+          </p:cNvPr>
+          <p:cNvSpPr>
+            <a:spLocks xmlns:a="http://schemas.openxmlformats.org/drawingml/2006/main" noGrp="1"/>
+          </p:cNvSpPr>
+          <p:nvPr/>
+        </p:nvSpPr>
+        <p:spPr>
+          <a:xfrm xmlns:a="http://schemas.openxmlformats.org/drawingml/2006/main">
+            <a:off x="1162050" y="2200275"/>
+            <a:ext cx="400050" cy="400050"/>
+          </a:xfrm>
+          <a:prstGeom xmlns:a="http://schemas.openxmlformats.org/drawingml/2006/main" prst="rect">
+            <a:avLst/>
+          </a:prstGeom>
+          <a:noFill xmlns:a="http://schemas.openxmlformats.org/drawingml/2006/main"/>
+          <a:ln xmlns:a="http://schemas.openxmlformats.org/drawingml/2006/main" w="0">
+            <a:noFill/>
+          </a:ln>
+        </p:spPr>
+        <p:txBody>
+          <a:bodyPr xmlns:a="http://schemas.openxmlformats.org/drawingml/2006/main" anchor="ctr">
+            <a:normAutofit fontScale="100000"/>
+          </a:bodyPr>
+          <a:lstStyle xmlns:a="http://schemas.openxmlformats.org/drawingml/2006/main"/>
+          <a:p xmlns:a="http://schemas.openxmlformats.org/drawingml/2006/main">
+            <a:pPr algn="ctr">
+              <a:defRPr sz="1125" b="1">
+                <a:solidFill>
+                  <a:srgbClr val="2C6E73"/>
+                </a:solidFill>
+                <a:latin typeface="Arial"/>
+                <a:ea typeface="Arial"/>
+                <a:cs typeface="Arial"/>
+              </a:defRPr>
+            </a:pPr>
+            <a:r>
+              <a:rPr sz="1125" b="1">
+                <a:solidFill>
+                  <a:srgbClr val="2C6E73"/>
+                </a:solidFill>
+                <a:latin typeface="Arial"/>
+                <a:ea typeface="Arial"/>
+                <a:cs typeface="Arial"/>
+              </a:rPr>
+              <a:t>1</a:t>
+            </a:r>
+          </a:p>
+        </p:txBody>
+      </p:sp>
+      <p:sp>
+        <p:nvSpPr>
+          <p:cNvPr id="13" name="">
+            <a:extLst xmlns:a="http://schemas.openxmlformats.org/drawingml/2006/main">
+              <a:ext uri="{FF2B5EF4-FFF2-40B4-BE49-F238E27FC236}">
+                <a16:creationId xmlns:a16="http://schemas.microsoft.com/office/drawing/2014/main" id="{12A9101D-5791-4699-8C25-727A8373CC14}"/>
+              </a:ext>
+            </a:extLst>
+          </p:cNvPr>
+          <p:cNvSpPr>
+            <a:spLocks xmlns:a="http://schemas.openxmlformats.org/drawingml/2006/main" noGrp="1"/>
+          </p:cNvSpPr>
+          <p:nvPr/>
+        </p:nvSpPr>
+        <p:spPr>
+          <a:xfrm xmlns:a="http://schemas.openxmlformats.org/drawingml/2006/main">
+            <a:off x="1714500" y="2114550"/>
+            <a:ext cx="9525000" cy="638175"/>
+          </a:xfrm>
+          <a:prstGeom xmlns:a="http://schemas.openxmlformats.org/drawingml/2006/main" prst="rect">
+            <a:avLst/>
+          </a:prstGeom>
+          <a:noFill xmlns:a="http://schemas.openxmlformats.org/drawingml/2006/main"/>
+          <a:ln xmlns:a="http://schemas.openxmlformats.org/drawingml/2006/main" w="0">
+            <a:noFill/>
+          </a:ln>
+        </p:spPr>
+        <p:txBody>
+          <a:bodyPr xmlns:a="http://schemas.openxmlformats.org/drawingml/2006/main" anchor="ctr">
+            <a:normAutofit fontScale="100000"/>
+          </a:bodyPr>
+          <a:lstStyle xmlns:a="http://schemas.openxmlformats.org/drawingml/2006/main"/>
+          <a:p xmlns:a="http://schemas.openxmlformats.org/drawingml/2006/main">
+            <a:pPr algn="l">
+              <a:defRPr sz="1575" b="0">
+                <a:solidFill>
+                  <a:srgbClr val="17253A"/>
+                </a:solidFill>
+                <a:latin typeface="Arial"/>
+                <a:ea typeface="Arial"/>
+                <a:cs typeface="Arial"/>
+              </a:defRPr>
+            </a:pPr>
+            <a:r>
+              <a:rPr sz="1575" b="0">
+                <a:solidFill>
+                  <a:srgbClr val="17253A"/>
+                </a:solidFill>
+                <a:latin typeface="Arial"/>
+                <a:ea typeface="Arial"/>
+                <a:cs typeface="Arial"/>
+              </a:rPr>
+              <a:t>47 × 36</a:t>
+            </a:r>
+          </a:p>
+        </p:txBody>
+      </p:sp>
+      <p:sp>
+        <p:nvSpPr>
+          <p:cNvPr id="14" name="">
+            <a:extLst xmlns:a="http://schemas.openxmlformats.org/drawingml/2006/main">
+              <a:ext uri="{FF2B5EF4-FFF2-40B4-BE49-F238E27FC236}">
+                <a16:creationId xmlns:a16="http://schemas.microsoft.com/office/drawing/2014/main" id="{D8ECFB26-BF70-4993-A535-20BB26B44F45}"/>
+              </a:ext>
+            </a:extLst>
+          </p:cNvPr>
+          <p:cNvSpPr>
+            <a:spLocks xmlns:a="http://schemas.openxmlformats.org/drawingml/2006/main" noGrp="1"/>
+          </p:cNvSpPr>
+          <p:nvPr/>
+        </p:nvSpPr>
+        <p:spPr>
+          <a:xfrm xmlns:a="http://schemas.openxmlformats.org/drawingml/2006/main">
+            <a:off x="1714500" y="2771775"/>
+            <a:ext cx="9334500" cy="9525"/>
+          </a:xfrm>
+          <a:prstGeom xmlns:a="http://schemas.openxmlformats.org/drawingml/2006/main" prst="rect">
+            <a:avLst/>
+          </a:prstGeom>
+          <a:solidFill xmlns:a="http://schemas.openxmlformats.org/drawingml/2006/main">
+            <a:srgbClr val="D9E0E6"/>
+          </a:solidFill>
+          <a:ln xmlns:a="http://schemas.openxmlformats.org/drawingml/2006/main" w="0">
             <a:solidFill>
               <a:srgbClr val="D9E0E6"/>
             </a:solidFill>
@@ -8298,22 +8442,22 @@
       </p:sp>
       <p:sp>
         <p:nvSpPr>
-          <p:cNvPr id="12" name="">
-            <a:extLst xmlns:a="http://schemas.openxmlformats.org/drawingml/2006/main">
-              <a:ext uri="{FF2B5EF4-FFF2-40B4-BE49-F238E27FC236}">
-                <a16:creationId xmlns:a16="http://schemas.microsoft.com/office/drawing/2014/main" id="{EDD8AE23-7635-4E73-AC6D-9928E4E33E30}"/>
-              </a:ext>
-            </a:extLst>
-          </p:cNvPr>
-          <p:cNvSpPr>
-            <a:spLocks xmlns:a="http://schemas.openxmlformats.org/drawingml/2006/main" noGrp="1"/>
-          </p:cNvSpPr>
-          <p:nvPr/>
-        </p:nvSpPr>
-        <p:spPr>
-          <a:xfrm xmlns:a="http://schemas.openxmlformats.org/drawingml/2006/main">
-            <a:off x="952500" y="2266950"/>
-            <a:ext cx="3238500" cy="419100"/>
+          <p:cNvPr id="15" name="">
+            <a:extLst xmlns:a="http://schemas.openxmlformats.org/drawingml/2006/main">
+              <a:ext uri="{FF2B5EF4-FFF2-40B4-BE49-F238E27FC236}">
+                <a16:creationId xmlns:a16="http://schemas.microsoft.com/office/drawing/2014/main" id="{DFB47241-7E21-40A9-B95D-10F5B5AD2555}"/>
+              </a:ext>
+            </a:extLst>
+          </p:cNvPr>
+          <p:cNvSpPr>
+            <a:spLocks xmlns:a="http://schemas.openxmlformats.org/drawingml/2006/main" noGrp="1"/>
+          </p:cNvSpPr>
+          <p:nvPr/>
+        </p:nvSpPr>
+        <p:spPr>
+          <a:xfrm xmlns:a="http://schemas.openxmlformats.org/drawingml/2006/main">
+            <a:off x="1162050" y="2905125"/>
+            <a:ext cx="400050" cy="400050"/>
           </a:xfrm>
           <a:prstGeom xmlns:a="http://schemas.openxmlformats.org/drawingml/2006/main" prst="rect">
             <a:avLst/>
@@ -8348,29 +8492,29 @@
                 <a:ea typeface="Arial"/>
                 <a:cs typeface="Arial"/>
               </a:rPr>
-              <a:t>Ones row: 47 × 6 = 282</a:t>
-            </a:r>
-          </a:p>
-        </p:txBody>
-      </p:sp>
-      <p:sp>
-        <p:nvSpPr>
-          <p:cNvPr id="13" name="">
-            <a:extLst xmlns:a="http://schemas.openxmlformats.org/drawingml/2006/main">
-              <a:ext uri="{FF2B5EF4-FFF2-40B4-BE49-F238E27FC236}">
-                <a16:creationId xmlns:a16="http://schemas.microsoft.com/office/drawing/2014/main" id="{DA2F8197-7394-453F-A9D1-EAAFF0005C7B}"/>
-              </a:ext>
-            </a:extLst>
-          </p:cNvPr>
-          <p:cNvSpPr>
-            <a:spLocks xmlns:a="http://schemas.openxmlformats.org/drawingml/2006/main" noGrp="1"/>
-          </p:cNvSpPr>
-          <p:nvPr/>
-        </p:nvSpPr>
-        <p:spPr>
-          <a:xfrm xmlns:a="http://schemas.openxmlformats.org/drawingml/2006/main">
-            <a:off x="4381500" y="2266950"/>
-            <a:ext cx="3238500" cy="419100"/>
+              <a:t>2</a:t>
+            </a:r>
+          </a:p>
+        </p:txBody>
+      </p:sp>
+      <p:sp>
+        <p:nvSpPr>
+          <p:cNvPr id="16" name="">
+            <a:extLst xmlns:a="http://schemas.openxmlformats.org/drawingml/2006/main">
+              <a:ext uri="{FF2B5EF4-FFF2-40B4-BE49-F238E27FC236}">
+                <a16:creationId xmlns:a16="http://schemas.microsoft.com/office/drawing/2014/main" id="{5C36FB55-EE20-48E6-B8E3-A7B3161FCE18}"/>
+              </a:ext>
+            </a:extLst>
+          </p:cNvPr>
+          <p:cNvSpPr>
+            <a:spLocks xmlns:a="http://schemas.openxmlformats.org/drawingml/2006/main" noGrp="1"/>
+          </p:cNvSpPr>
+          <p:nvPr/>
+        </p:nvSpPr>
+        <p:spPr>
+          <a:xfrm xmlns:a="http://schemas.openxmlformats.org/drawingml/2006/main">
+            <a:off x="1714500" y="2819400"/>
+            <a:ext cx="9525000" cy="638175"/>
           </a:xfrm>
           <a:prstGeom xmlns:a="http://schemas.openxmlformats.org/drawingml/2006/main" prst="rect">
             <a:avLst/>
@@ -8386,10 +8530,10 @@
           </a:bodyPr>
           <a:lstStyle xmlns:a="http://schemas.openxmlformats.org/drawingml/2006/main"/>
           <a:p xmlns:a="http://schemas.openxmlformats.org/drawingml/2006/main">
-            <a:pPr algn="ctr">
-              <a:defRPr sz="1125" b="1">
-                <a:solidFill>
-                  <a:srgbClr val="2C6E73"/>
+            <a:pPr algn="l">
+              <a:defRPr sz="1575" b="0">
+                <a:solidFill>
+                  <a:srgbClr val="17253A"/>
                 </a:solidFill>
                 <a:latin typeface="Arial"/>
                 <a:ea typeface="Arial"/>
@@ -8397,124 +8541,69 @@
               </a:defRPr>
             </a:pPr>
             <a:r>
-              <a:rPr sz="1125" b="1">
-                <a:solidFill>
-                  <a:srgbClr val="2C6E73"/>
+              <a:rPr sz="1575" b="0">
+                <a:solidFill>
+                  <a:srgbClr val="17253A"/>
                 </a:solidFill>
                 <a:latin typeface="Arial"/>
                 <a:ea typeface="Arial"/>
                 <a:cs typeface="Arial"/>
               </a:rPr>
-              <a:t>Tens row: 47 × 30 = 1410</a:t>
-            </a:r>
-          </a:p>
-        </p:txBody>
-      </p:sp>
-      <p:sp>
-        <p:nvSpPr>
-          <p:cNvPr id="14" name="">
-            <a:extLst xmlns:a="http://schemas.openxmlformats.org/drawingml/2006/main">
-              <a:ext uri="{FF2B5EF4-FFF2-40B4-BE49-F238E27FC236}">
-                <a16:creationId xmlns:a16="http://schemas.microsoft.com/office/drawing/2014/main" id="{AE0DCC75-18FF-49CD-99CC-04D27182EA92}"/>
-              </a:ext>
-            </a:extLst>
-          </p:cNvPr>
-          <p:cNvSpPr>
-            <a:spLocks xmlns:a="http://schemas.openxmlformats.org/drawingml/2006/main" noGrp="1"/>
-          </p:cNvSpPr>
-          <p:nvPr/>
-        </p:nvSpPr>
-        <p:spPr>
-          <a:xfrm xmlns:a="http://schemas.openxmlformats.org/drawingml/2006/main">
-            <a:off x="7810500" y="2266950"/>
-            <a:ext cx="3238500" cy="419100"/>
-          </a:xfrm>
-          <a:prstGeom xmlns:a="http://schemas.openxmlformats.org/drawingml/2006/main" prst="rect">
-            <a:avLst/>
-          </a:prstGeom>
-          <a:noFill xmlns:a="http://schemas.openxmlformats.org/drawingml/2006/main"/>
-          <a:ln xmlns:a="http://schemas.openxmlformats.org/drawingml/2006/main" w="0">
-            <a:noFill/>
-          </a:ln>
-        </p:spPr>
-        <p:txBody>
-          <a:bodyPr xmlns:a="http://schemas.openxmlformats.org/drawingml/2006/main" anchor="ctr">
-            <a:normAutofit fontScale="95556"/>
-          </a:bodyPr>
-          <a:lstStyle xmlns:a="http://schemas.openxmlformats.org/drawingml/2006/main"/>
-          <a:p xmlns:a="http://schemas.openxmlformats.org/drawingml/2006/main">
-            <a:pPr algn="ctr">
-              <a:defRPr sz="1125" b="1">
-                <a:solidFill>
-                  <a:srgbClr val="2C6E73"/>
-                </a:solidFill>
-                <a:latin typeface="Arial"/>
-                <a:ea typeface="Arial"/>
-                <a:cs typeface="Arial"/>
-              </a:defRPr>
-            </a:pPr>
-            <a:r>
-              <a:rPr sz="1125" b="1">
-                <a:solidFill>
-                  <a:srgbClr val="2C6E73"/>
-                </a:solidFill>
-                <a:latin typeface="Arial"/>
-                <a:ea typeface="Arial"/>
-                <a:cs typeface="Arial"/>
-              </a:rPr>
-              <a:t>Estimate first: Estimate the product before calculating.</a:t>
-            </a:r>
-          </a:p>
-        </p:txBody>
-      </p:sp>
-      <p:sp>
-        <p:nvSpPr>
-          <p:cNvPr id="15" name="">
-            <a:extLst xmlns:a="http://schemas.openxmlformats.org/drawingml/2006/main">
-              <a:ext uri="{FF2B5EF4-FFF2-40B4-BE49-F238E27FC236}">
-                <a16:creationId xmlns:a16="http://schemas.microsoft.com/office/drawing/2014/main" id="{B8070A30-A191-4299-B895-07A0346B3E84}"/>
-              </a:ext>
-            </a:extLst>
-          </p:cNvPr>
-          <p:cNvSpPr>
-            <a:spLocks xmlns:a="http://schemas.openxmlformats.org/drawingml/2006/main" noGrp="1"/>
-          </p:cNvSpPr>
-          <p:nvPr/>
-        </p:nvSpPr>
-        <p:spPr>
-          <a:xfrm xmlns:a="http://schemas.openxmlformats.org/drawingml/2006/main">
-            <a:off x="1000125" y="3028950"/>
-            <a:ext cx="476250" cy="476250"/>
-          </a:xfrm>
-          <a:prstGeom xmlns:a="http://schemas.openxmlformats.org/drawingml/2006/main" prst="ellipse">
+              <a:t>47 × 6 = 282</a:t>
+            </a:r>
+          </a:p>
+        </p:txBody>
+      </p:sp>
+      <p:sp>
+        <p:nvSpPr>
+          <p:cNvPr id="17" name="">
+            <a:extLst xmlns:a="http://schemas.openxmlformats.org/drawingml/2006/main">
+              <a:ext uri="{FF2B5EF4-FFF2-40B4-BE49-F238E27FC236}">
+                <a16:creationId xmlns:a16="http://schemas.microsoft.com/office/drawing/2014/main" id="{2FCF28E1-AC13-4D8F-A78B-55707B2CF174}"/>
+              </a:ext>
+            </a:extLst>
+          </p:cNvPr>
+          <p:cNvSpPr>
+            <a:spLocks xmlns:a="http://schemas.openxmlformats.org/drawingml/2006/main" noGrp="1"/>
+          </p:cNvSpPr>
+          <p:nvPr/>
+        </p:nvSpPr>
+        <p:spPr>
+          <a:xfrm xmlns:a="http://schemas.openxmlformats.org/drawingml/2006/main">
+            <a:off x="1714500" y="3476625"/>
+            <a:ext cx="9334500" cy="9525"/>
+          </a:xfrm>
+          <a:prstGeom xmlns:a="http://schemas.openxmlformats.org/drawingml/2006/main" prst="rect">
             <a:avLst/>
           </a:prstGeom>
           <a:solidFill xmlns:a="http://schemas.openxmlformats.org/drawingml/2006/main">
-            <a:srgbClr val="18324A"/>
+            <a:srgbClr val="D9E0E6"/>
           </a:solidFill>
           <a:ln xmlns:a="http://schemas.openxmlformats.org/drawingml/2006/main" w="0">
-            <a:noFill/>
-          </a:ln>
-        </p:spPr>
-      </p:sp>
-      <p:sp>
-        <p:nvSpPr>
-          <p:cNvPr id="16" name="">
-            <a:extLst xmlns:a="http://schemas.openxmlformats.org/drawingml/2006/main">
-              <a:ext uri="{FF2B5EF4-FFF2-40B4-BE49-F238E27FC236}">
-                <a16:creationId xmlns:a16="http://schemas.microsoft.com/office/drawing/2014/main" id="{A7F480C6-CE61-48BA-92AE-019F6577B647}"/>
-              </a:ext>
-            </a:extLst>
-          </p:cNvPr>
-          <p:cNvSpPr>
-            <a:spLocks xmlns:a="http://schemas.openxmlformats.org/drawingml/2006/main" noGrp="1"/>
-          </p:cNvSpPr>
-          <p:nvPr/>
-        </p:nvSpPr>
-        <p:spPr>
-          <a:xfrm xmlns:a="http://schemas.openxmlformats.org/drawingml/2006/main">
-            <a:off x="1000125" y="3057525"/>
-            <a:ext cx="476250" cy="419100"/>
+            <a:solidFill>
+              <a:srgbClr val="D9E0E6"/>
+            </a:solidFill>
+          </a:ln>
+        </p:spPr>
+      </p:sp>
+      <p:sp>
+        <p:nvSpPr>
+          <p:cNvPr id="18" name="">
+            <a:extLst xmlns:a="http://schemas.openxmlformats.org/drawingml/2006/main">
+              <a:ext uri="{FF2B5EF4-FFF2-40B4-BE49-F238E27FC236}">
+                <a16:creationId xmlns:a16="http://schemas.microsoft.com/office/drawing/2014/main" id="{B354AADA-03B7-4D09-854E-164E661379A2}"/>
+              </a:ext>
+            </a:extLst>
+          </p:cNvPr>
+          <p:cNvSpPr>
+            <a:spLocks xmlns:a="http://schemas.openxmlformats.org/drawingml/2006/main" noGrp="1"/>
+          </p:cNvSpPr>
+          <p:nvPr/>
+        </p:nvSpPr>
+        <p:spPr>
+          <a:xfrm xmlns:a="http://schemas.openxmlformats.org/drawingml/2006/main">
+            <a:off x="1162050" y="3609975"/>
+            <a:ext cx="400050" cy="400050"/>
           </a:xfrm>
           <a:prstGeom xmlns:a="http://schemas.openxmlformats.org/drawingml/2006/main" prst="rect">
             <a:avLst/>
@@ -8531,9 +8620,9 @@
           <a:lstStyle xmlns:a="http://schemas.openxmlformats.org/drawingml/2006/main"/>
           <a:p xmlns:a="http://schemas.openxmlformats.org/drawingml/2006/main">
             <a:pPr algn="ctr">
-              <a:defRPr sz="1350" b="1">
-                <a:solidFill>
-                  <a:srgbClr val="FFFFFF"/>
+              <a:defRPr sz="1125" b="1">
+                <a:solidFill>
+                  <a:srgbClr val="2C6E73"/>
                 </a:solidFill>
                 <a:latin typeface="Arial"/>
                 <a:ea typeface="Arial"/>
@@ -8541,37 +8630,37 @@
               </a:defRPr>
             </a:pPr>
             <a:r>
-              <a:rPr sz="1350" b="1">
-                <a:solidFill>
-                  <a:srgbClr val="FFFFFF"/>
+              <a:rPr sz="1125" b="1">
+                <a:solidFill>
+                  <a:srgbClr val="2C6E73"/>
                 </a:solidFill>
                 <a:latin typeface="Arial"/>
                 <a:ea typeface="Arial"/>
                 <a:cs typeface="Arial"/>
               </a:rPr>
-              <a:t>1</a:t>
-            </a:r>
-          </a:p>
-        </p:txBody>
-      </p:sp>
-      <p:sp>
-        <p:nvSpPr>
-          <p:cNvPr id="17" name="">
-            <a:extLst xmlns:a="http://schemas.openxmlformats.org/drawingml/2006/main">
-              <a:ext uri="{FF2B5EF4-FFF2-40B4-BE49-F238E27FC236}">
-                <a16:creationId xmlns:a16="http://schemas.microsoft.com/office/drawing/2014/main" id="{7E381C17-047D-4B20-B04B-CBF7ABE295D0}"/>
-              </a:ext>
-            </a:extLst>
-          </p:cNvPr>
-          <p:cNvSpPr>
-            <a:spLocks xmlns:a="http://schemas.openxmlformats.org/drawingml/2006/main" noGrp="1"/>
-          </p:cNvSpPr>
-          <p:nvPr/>
-        </p:nvSpPr>
-        <p:spPr>
-          <a:xfrm xmlns:a="http://schemas.openxmlformats.org/drawingml/2006/main">
-            <a:off x="1714500" y="2962275"/>
-            <a:ext cx="9429750" cy="609600"/>
+              <a:t>3</a:t>
+            </a:r>
+          </a:p>
+        </p:txBody>
+      </p:sp>
+      <p:sp>
+        <p:nvSpPr>
+          <p:cNvPr id="19" name="">
+            <a:extLst xmlns:a="http://schemas.openxmlformats.org/drawingml/2006/main">
+              <a:ext uri="{FF2B5EF4-FFF2-40B4-BE49-F238E27FC236}">
+                <a16:creationId xmlns:a16="http://schemas.microsoft.com/office/drawing/2014/main" id="{C8A137E6-3537-41E7-A925-56C579A3796A}"/>
+              </a:ext>
+            </a:extLst>
+          </p:cNvPr>
+          <p:cNvSpPr>
+            <a:spLocks xmlns:a="http://schemas.openxmlformats.org/drawingml/2006/main" noGrp="1"/>
+          </p:cNvSpPr>
+          <p:nvPr/>
+        </p:nvSpPr>
+        <p:spPr>
+          <a:xfrm xmlns:a="http://schemas.openxmlformats.org/drawingml/2006/main">
+            <a:off x="1714500" y="3524250"/>
+            <a:ext cx="9525000" cy="638175"/>
           </a:xfrm>
           <a:prstGeom xmlns:a="http://schemas.openxmlformats.org/drawingml/2006/main" prst="rect">
             <a:avLst/>
@@ -8588,7 +8677,7 @@
           <a:lstStyle xmlns:a="http://schemas.openxmlformats.org/drawingml/2006/main"/>
           <a:p xmlns:a="http://schemas.openxmlformats.org/drawingml/2006/main">
             <a:pPr algn="l">
-              <a:defRPr sz="1500" b="0">
+              <a:defRPr sz="1575" b="0">
                 <a:solidFill>
                   <a:srgbClr val="17253A"/>
                 </a:solidFill>
@@ -8598,7 +8687,7 @@
               </a:defRPr>
             </a:pPr>
             <a:r>
-              <a:rPr sz="1500" b="0">
+              <a:rPr sz="1575" b="0">
                 <a:solidFill>
                   <a:srgbClr val="17253A"/>
                 </a:solidFill>
@@ -8606,59 +8695,61 @@
                 <a:ea typeface="Arial"/>
                 <a:cs typeface="Arial"/>
               </a:rPr>
-              <a:t>Write 47 × 36 in place-value columns.</a:t>
-            </a:r>
-          </a:p>
-        </p:txBody>
-      </p:sp>
-      <p:sp>
-        <p:nvSpPr>
-          <p:cNvPr id="18" name="">
-            <a:extLst xmlns:a="http://schemas.openxmlformats.org/drawingml/2006/main">
-              <a:ext uri="{FF2B5EF4-FFF2-40B4-BE49-F238E27FC236}">
-                <a16:creationId xmlns:a16="http://schemas.microsoft.com/office/drawing/2014/main" id="{DF72F3AA-E521-4BFF-BC37-7E875DE34862}"/>
-              </a:ext>
-            </a:extLst>
-          </p:cNvPr>
-          <p:cNvSpPr>
-            <a:spLocks xmlns:a="http://schemas.openxmlformats.org/drawingml/2006/main" noGrp="1"/>
-          </p:cNvSpPr>
-          <p:nvPr/>
-        </p:nvSpPr>
-        <p:spPr>
-          <a:xfrm xmlns:a="http://schemas.openxmlformats.org/drawingml/2006/main">
-            <a:off x="1000125" y="3771900"/>
-            <a:ext cx="476250" cy="476250"/>
-          </a:xfrm>
-          <a:prstGeom xmlns:a="http://schemas.openxmlformats.org/drawingml/2006/main" prst="ellipse">
+              <a:t>47 × 30 = 1,410</a:t>
+            </a:r>
+          </a:p>
+        </p:txBody>
+      </p:sp>
+      <p:sp>
+        <p:nvSpPr>
+          <p:cNvPr id="20" name="">
+            <a:extLst xmlns:a="http://schemas.openxmlformats.org/drawingml/2006/main">
+              <a:ext uri="{FF2B5EF4-FFF2-40B4-BE49-F238E27FC236}">
+                <a16:creationId xmlns:a16="http://schemas.microsoft.com/office/drawing/2014/main" id="{7A90FAB0-60B2-4F37-A98E-3A6DF6C7571C}"/>
+              </a:ext>
+            </a:extLst>
+          </p:cNvPr>
+          <p:cNvSpPr>
+            <a:spLocks xmlns:a="http://schemas.openxmlformats.org/drawingml/2006/main" noGrp="1"/>
+          </p:cNvSpPr>
+          <p:nvPr/>
+        </p:nvSpPr>
+        <p:spPr>
+          <a:xfrm xmlns:a="http://schemas.openxmlformats.org/drawingml/2006/main">
+            <a:off x="1714500" y="4181475"/>
+            <a:ext cx="9334500" cy="9525"/>
+          </a:xfrm>
+          <a:prstGeom xmlns:a="http://schemas.openxmlformats.org/drawingml/2006/main" prst="rect">
             <a:avLst/>
           </a:prstGeom>
           <a:solidFill xmlns:a="http://schemas.openxmlformats.org/drawingml/2006/main">
-            <a:srgbClr val="2C6E73"/>
+            <a:srgbClr val="D9E0E6"/>
           </a:solidFill>
           <a:ln xmlns:a="http://schemas.openxmlformats.org/drawingml/2006/main" w="0">
-            <a:noFill/>
-          </a:ln>
-        </p:spPr>
-      </p:sp>
-      <p:sp>
-        <p:nvSpPr>
-          <p:cNvPr id="19" name="">
-            <a:extLst xmlns:a="http://schemas.openxmlformats.org/drawingml/2006/main">
-              <a:ext uri="{FF2B5EF4-FFF2-40B4-BE49-F238E27FC236}">
-                <a16:creationId xmlns:a16="http://schemas.microsoft.com/office/drawing/2014/main" id="{B8461E28-B36E-4321-8C9B-861B0CDD6329}"/>
-              </a:ext>
-            </a:extLst>
-          </p:cNvPr>
-          <p:cNvSpPr>
-            <a:spLocks xmlns:a="http://schemas.openxmlformats.org/drawingml/2006/main" noGrp="1"/>
-          </p:cNvSpPr>
-          <p:nvPr/>
-        </p:nvSpPr>
-        <p:spPr>
-          <a:xfrm xmlns:a="http://schemas.openxmlformats.org/drawingml/2006/main">
-            <a:off x="1000125" y="3800475"/>
-            <a:ext cx="476250" cy="419100"/>
+            <a:solidFill>
+              <a:srgbClr val="D9E0E6"/>
+            </a:solidFill>
+          </a:ln>
+        </p:spPr>
+      </p:sp>
+      <p:sp>
+        <p:nvSpPr>
+          <p:cNvPr id="21" name="">
+            <a:extLst xmlns:a="http://schemas.openxmlformats.org/drawingml/2006/main">
+              <a:ext uri="{FF2B5EF4-FFF2-40B4-BE49-F238E27FC236}">
+                <a16:creationId xmlns:a16="http://schemas.microsoft.com/office/drawing/2014/main" id="{35CCB7B0-14B4-48EF-BCAD-CB38B76C3072}"/>
+              </a:ext>
+            </a:extLst>
+          </p:cNvPr>
+          <p:cNvSpPr>
+            <a:spLocks xmlns:a="http://schemas.openxmlformats.org/drawingml/2006/main" noGrp="1"/>
+          </p:cNvSpPr>
+          <p:nvPr/>
+        </p:nvSpPr>
+        <p:spPr>
+          <a:xfrm xmlns:a="http://schemas.openxmlformats.org/drawingml/2006/main">
+            <a:off x="1162050" y="4314825"/>
+            <a:ext cx="400050" cy="400050"/>
           </a:xfrm>
           <a:prstGeom xmlns:a="http://schemas.openxmlformats.org/drawingml/2006/main" prst="rect">
             <a:avLst/>
@@ -8675,9 +8766,9 @@
           <a:lstStyle xmlns:a="http://schemas.openxmlformats.org/drawingml/2006/main"/>
           <a:p xmlns:a="http://schemas.openxmlformats.org/drawingml/2006/main">
             <a:pPr algn="ctr">
-              <a:defRPr sz="1350" b="1">
-                <a:solidFill>
-                  <a:srgbClr val="FFFFFF"/>
+              <a:defRPr sz="1125" b="1">
+                <a:solidFill>
+                  <a:srgbClr val="2C6E73"/>
                 </a:solidFill>
                 <a:latin typeface="Arial"/>
                 <a:ea typeface="Arial"/>
@@ -8685,37 +8776,37 @@
               </a:defRPr>
             </a:pPr>
             <a:r>
-              <a:rPr sz="1350" b="1">
-                <a:solidFill>
-                  <a:srgbClr val="FFFFFF"/>
+              <a:rPr sz="1125" b="1">
+                <a:solidFill>
+                  <a:srgbClr val="2C6E73"/>
                 </a:solidFill>
                 <a:latin typeface="Arial"/>
                 <a:ea typeface="Arial"/>
                 <a:cs typeface="Arial"/>
               </a:rPr>
-              <a:t>2</a:t>
-            </a:r>
-          </a:p>
-        </p:txBody>
-      </p:sp>
-      <p:sp>
-        <p:nvSpPr>
-          <p:cNvPr id="20" name="">
-            <a:extLst xmlns:a="http://schemas.openxmlformats.org/drawingml/2006/main">
-              <a:ext uri="{FF2B5EF4-FFF2-40B4-BE49-F238E27FC236}">
-                <a16:creationId xmlns:a16="http://schemas.microsoft.com/office/drawing/2014/main" id="{31885E02-A7CD-4F9E-AB9F-D4CB4C3E7782}"/>
-              </a:ext>
-            </a:extLst>
-          </p:cNvPr>
-          <p:cNvSpPr>
-            <a:spLocks xmlns:a="http://schemas.openxmlformats.org/drawingml/2006/main" noGrp="1"/>
-          </p:cNvSpPr>
-          <p:nvPr/>
-        </p:nvSpPr>
-        <p:spPr>
-          <a:xfrm xmlns:a="http://schemas.openxmlformats.org/drawingml/2006/main">
-            <a:off x="1714500" y="3705225"/>
-            <a:ext cx="9429750" cy="609600"/>
+              <a:t>4</a:t>
+            </a:r>
+          </a:p>
+        </p:txBody>
+      </p:sp>
+      <p:sp>
+        <p:nvSpPr>
+          <p:cNvPr id="22" name="">
+            <a:extLst xmlns:a="http://schemas.openxmlformats.org/drawingml/2006/main">
+              <a:ext uri="{FF2B5EF4-FFF2-40B4-BE49-F238E27FC236}">
+                <a16:creationId xmlns:a16="http://schemas.microsoft.com/office/drawing/2014/main" id="{79DB1658-2FAC-487C-B78D-F0282534857A}"/>
+              </a:ext>
+            </a:extLst>
+          </p:cNvPr>
+          <p:cNvSpPr>
+            <a:spLocks xmlns:a="http://schemas.openxmlformats.org/drawingml/2006/main" noGrp="1"/>
+          </p:cNvSpPr>
+          <p:nvPr/>
+        </p:nvSpPr>
+        <p:spPr>
+          <a:xfrm xmlns:a="http://schemas.openxmlformats.org/drawingml/2006/main">
+            <a:off x="1714500" y="4229100"/>
+            <a:ext cx="9525000" cy="638175"/>
           </a:xfrm>
           <a:prstGeom xmlns:a="http://schemas.openxmlformats.org/drawingml/2006/main" prst="rect">
             <a:avLst/>
@@ -8732,7 +8823,7 @@
           <a:lstStyle xmlns:a="http://schemas.openxmlformats.org/drawingml/2006/main"/>
           <a:p xmlns:a="http://schemas.openxmlformats.org/drawingml/2006/main">
             <a:pPr algn="l">
-              <a:defRPr sz="1500" b="0">
+              <a:defRPr sz="1575" b="0">
                 <a:solidFill>
                   <a:srgbClr val="17253A"/>
                 </a:solidFill>
@@ -8742,7 +8833,7 @@
               </a:defRPr>
             </a:pPr>
             <a:r>
-              <a:rPr sz="1500" b="0">
+              <a:rPr sz="1575" b="0">
                 <a:solidFill>
                   <a:srgbClr val="17253A"/>
                 </a:solidFill>
@@ -8750,59 +8841,61 @@
                 <a:ea typeface="Arial"/>
                 <a:cs typeface="Arial"/>
               </a:rPr>
-              <a:t>Multiply by 6: first partial product 282.</a:t>
-            </a:r>
-          </a:p>
-        </p:txBody>
-      </p:sp>
-      <p:sp>
-        <p:nvSpPr>
-          <p:cNvPr id="21" name="">
-            <a:extLst xmlns:a="http://schemas.openxmlformats.org/drawingml/2006/main">
-              <a:ext uri="{FF2B5EF4-FFF2-40B4-BE49-F238E27FC236}">
-                <a16:creationId xmlns:a16="http://schemas.microsoft.com/office/drawing/2014/main" id="{06A7DFAF-C4FD-41B6-A4B0-C2F199A92DBA}"/>
-              </a:ext>
-            </a:extLst>
-          </p:cNvPr>
-          <p:cNvSpPr>
-            <a:spLocks xmlns:a="http://schemas.openxmlformats.org/drawingml/2006/main" noGrp="1"/>
-          </p:cNvSpPr>
-          <p:nvPr/>
-        </p:nvSpPr>
-        <p:spPr>
-          <a:xfrm xmlns:a="http://schemas.openxmlformats.org/drawingml/2006/main">
-            <a:off x="1000125" y="4514850"/>
-            <a:ext cx="476250" cy="476250"/>
-          </a:xfrm>
-          <a:prstGeom xmlns:a="http://schemas.openxmlformats.org/drawingml/2006/main" prst="ellipse">
+              <a:t>282 + 1,410</a:t>
+            </a:r>
+          </a:p>
+        </p:txBody>
+      </p:sp>
+      <p:sp>
+        <p:nvSpPr>
+          <p:cNvPr id="23" name="">
+            <a:extLst xmlns:a="http://schemas.openxmlformats.org/drawingml/2006/main">
+              <a:ext uri="{FF2B5EF4-FFF2-40B4-BE49-F238E27FC236}">
+                <a16:creationId xmlns:a16="http://schemas.microsoft.com/office/drawing/2014/main" id="{465B2A4C-1166-436B-B2A1-D63F6208B96B}"/>
+              </a:ext>
+            </a:extLst>
+          </p:cNvPr>
+          <p:cNvSpPr>
+            <a:spLocks xmlns:a="http://schemas.openxmlformats.org/drawingml/2006/main" noGrp="1"/>
+          </p:cNvSpPr>
+          <p:nvPr/>
+        </p:nvSpPr>
+        <p:spPr>
+          <a:xfrm xmlns:a="http://schemas.openxmlformats.org/drawingml/2006/main">
+            <a:off x="1714500" y="4886325"/>
+            <a:ext cx="9334500" cy="9525"/>
+          </a:xfrm>
+          <a:prstGeom xmlns:a="http://schemas.openxmlformats.org/drawingml/2006/main" prst="rect">
             <a:avLst/>
           </a:prstGeom>
           <a:solidFill xmlns:a="http://schemas.openxmlformats.org/drawingml/2006/main">
-            <a:srgbClr val="2C6E73"/>
+            <a:srgbClr val="D9E0E6"/>
           </a:solidFill>
           <a:ln xmlns:a="http://schemas.openxmlformats.org/drawingml/2006/main" w="0">
-            <a:noFill/>
-          </a:ln>
-        </p:spPr>
-      </p:sp>
-      <p:sp>
-        <p:nvSpPr>
-          <p:cNvPr id="22" name="">
-            <a:extLst xmlns:a="http://schemas.openxmlformats.org/drawingml/2006/main">
-              <a:ext uri="{FF2B5EF4-FFF2-40B4-BE49-F238E27FC236}">
-                <a16:creationId xmlns:a16="http://schemas.microsoft.com/office/drawing/2014/main" id="{15DD357D-85BA-4AF0-9215-4032AC2F9F47}"/>
-              </a:ext>
-            </a:extLst>
-          </p:cNvPr>
-          <p:cNvSpPr>
-            <a:spLocks xmlns:a="http://schemas.openxmlformats.org/drawingml/2006/main" noGrp="1"/>
-          </p:cNvSpPr>
-          <p:nvPr/>
-        </p:nvSpPr>
-        <p:spPr>
-          <a:xfrm xmlns:a="http://schemas.openxmlformats.org/drawingml/2006/main">
-            <a:off x="1000125" y="4543425"/>
-            <a:ext cx="476250" cy="419100"/>
+            <a:solidFill>
+              <a:srgbClr val="D9E0E6"/>
+            </a:solidFill>
+          </a:ln>
+        </p:spPr>
+      </p:sp>
+      <p:sp>
+        <p:nvSpPr>
+          <p:cNvPr id="24" name="">
+            <a:extLst xmlns:a="http://schemas.openxmlformats.org/drawingml/2006/main">
+              <a:ext uri="{FF2B5EF4-FFF2-40B4-BE49-F238E27FC236}">
+                <a16:creationId xmlns:a16="http://schemas.microsoft.com/office/drawing/2014/main" id="{A38D6AFD-54CE-4449-9E03-366C712E2D94}"/>
+              </a:ext>
+            </a:extLst>
+          </p:cNvPr>
+          <p:cNvSpPr>
+            <a:spLocks xmlns:a="http://schemas.openxmlformats.org/drawingml/2006/main" noGrp="1"/>
+          </p:cNvSpPr>
+          <p:nvPr/>
+        </p:nvSpPr>
+        <p:spPr>
+          <a:xfrm xmlns:a="http://schemas.openxmlformats.org/drawingml/2006/main">
+            <a:off x="1162050" y="5019675"/>
+            <a:ext cx="400050" cy="400050"/>
           </a:xfrm>
           <a:prstGeom xmlns:a="http://schemas.openxmlformats.org/drawingml/2006/main" prst="rect">
             <a:avLst/>
@@ -8819,9 +8912,9 @@
           <a:lstStyle xmlns:a="http://schemas.openxmlformats.org/drawingml/2006/main"/>
           <a:p xmlns:a="http://schemas.openxmlformats.org/drawingml/2006/main">
             <a:pPr algn="ctr">
-              <a:defRPr sz="1350" b="1">
-                <a:solidFill>
-                  <a:srgbClr val="FFFFFF"/>
+              <a:defRPr sz="1125" b="1">
+                <a:solidFill>
+                  <a:srgbClr val="2F785D"/>
                 </a:solidFill>
                 <a:latin typeface="Arial"/>
                 <a:ea typeface="Arial"/>
@@ -8829,37 +8922,37 @@
               </a:defRPr>
             </a:pPr>
             <a:r>
-              <a:rPr sz="1350" b="1">
-                <a:solidFill>
-                  <a:srgbClr val="FFFFFF"/>
+              <a:rPr sz="1125" b="1">
+                <a:solidFill>
+                  <a:srgbClr val="2F785D"/>
                 </a:solidFill>
                 <a:latin typeface="Arial"/>
                 <a:ea typeface="Arial"/>
                 <a:cs typeface="Arial"/>
               </a:rPr>
-              <a:t>3</a:t>
-            </a:r>
-          </a:p>
-        </p:txBody>
-      </p:sp>
-      <p:sp>
-        <p:nvSpPr>
-          <p:cNvPr id="23" name="">
-            <a:extLst xmlns:a="http://schemas.openxmlformats.org/drawingml/2006/main">
-              <a:ext uri="{FF2B5EF4-FFF2-40B4-BE49-F238E27FC236}">
-                <a16:creationId xmlns:a16="http://schemas.microsoft.com/office/drawing/2014/main" id="{DE002EE2-18AB-4947-9494-D362F34F4B5C}"/>
-              </a:ext>
-            </a:extLst>
-          </p:cNvPr>
-          <p:cNvSpPr>
-            <a:spLocks xmlns:a="http://schemas.openxmlformats.org/drawingml/2006/main" noGrp="1"/>
-          </p:cNvSpPr>
-          <p:nvPr/>
-        </p:nvSpPr>
-        <p:spPr>
-          <a:xfrm xmlns:a="http://schemas.openxmlformats.org/drawingml/2006/main">
-            <a:off x="1714500" y="4448175"/>
-            <a:ext cx="9429750" cy="609600"/>
+              <a:t>5</a:t>
+            </a:r>
+          </a:p>
+        </p:txBody>
+      </p:sp>
+      <p:sp>
+        <p:nvSpPr>
+          <p:cNvPr id="25" name="">
+            <a:extLst xmlns:a="http://schemas.openxmlformats.org/drawingml/2006/main">
+              <a:ext uri="{FF2B5EF4-FFF2-40B4-BE49-F238E27FC236}">
+                <a16:creationId xmlns:a16="http://schemas.microsoft.com/office/drawing/2014/main" id="{86918D72-281B-405C-9F8A-F101B7A2B65F}"/>
+              </a:ext>
+            </a:extLst>
+          </p:cNvPr>
+          <p:cNvSpPr>
+            <a:spLocks xmlns:a="http://schemas.openxmlformats.org/drawingml/2006/main" noGrp="1"/>
+          </p:cNvSpPr>
+          <p:nvPr/>
+        </p:nvSpPr>
+        <p:spPr>
+          <a:xfrm xmlns:a="http://schemas.openxmlformats.org/drawingml/2006/main">
+            <a:off x="1714500" y="4933950"/>
+            <a:ext cx="9525000" cy="638175"/>
           </a:xfrm>
           <a:prstGeom xmlns:a="http://schemas.openxmlformats.org/drawingml/2006/main" prst="rect">
             <a:avLst/>
@@ -8876,9 +8969,9 @@
           <a:lstStyle xmlns:a="http://schemas.openxmlformats.org/drawingml/2006/main"/>
           <a:p xmlns:a="http://schemas.openxmlformats.org/drawingml/2006/main">
             <a:pPr algn="l">
-              <a:defRPr sz="1500" b="0">
-                <a:solidFill>
-                  <a:srgbClr val="17253A"/>
+              <a:defRPr sz="1575" b="1">
+                <a:solidFill>
+                  <a:srgbClr val="2F785D"/>
                 </a:solidFill>
                 <a:latin typeface="Arial"/>
                 <a:ea typeface="Arial"/>
@@ -8886,159 +8979,15 @@
               </a:defRPr>
             </a:pPr>
             <a:r>
-              <a:rPr sz="1500" b="0">
-                <a:solidFill>
-                  <a:srgbClr val="17253A"/>
+              <a:rPr sz="1575" b="1">
+                <a:solidFill>
+                  <a:srgbClr val="2F785D"/>
                 </a:solidFill>
                 <a:latin typeface="Arial"/>
                 <a:ea typeface="Arial"/>
                 <a:cs typeface="Arial"/>
               </a:rPr>
-              <a:t>Multiply by 30: second partial product 1410.</a:t>
-            </a:r>
-          </a:p>
-        </p:txBody>
-      </p:sp>
-      <p:sp>
-        <p:nvSpPr>
-          <p:cNvPr id="24" name="">
-            <a:extLst xmlns:a="http://schemas.openxmlformats.org/drawingml/2006/main">
-              <a:ext uri="{FF2B5EF4-FFF2-40B4-BE49-F238E27FC236}">
-                <a16:creationId xmlns:a16="http://schemas.microsoft.com/office/drawing/2014/main" id="{3916584E-C078-4C85-A534-53022BB15066}"/>
-              </a:ext>
-            </a:extLst>
-          </p:cNvPr>
-          <p:cNvSpPr>
-            <a:spLocks xmlns:a="http://schemas.openxmlformats.org/drawingml/2006/main" noGrp="1"/>
-          </p:cNvSpPr>
-          <p:nvPr/>
-        </p:nvSpPr>
-        <p:spPr>
-          <a:xfrm xmlns:a="http://schemas.openxmlformats.org/drawingml/2006/main">
-            <a:off x="1000125" y="5257800"/>
-            <a:ext cx="476250" cy="476250"/>
-          </a:xfrm>
-          <a:prstGeom xmlns:a="http://schemas.openxmlformats.org/drawingml/2006/main" prst="ellipse">
-            <a:avLst/>
-          </a:prstGeom>
-          <a:solidFill xmlns:a="http://schemas.openxmlformats.org/drawingml/2006/main">
-            <a:srgbClr val="2C6E73"/>
-          </a:solidFill>
-          <a:ln xmlns:a="http://schemas.openxmlformats.org/drawingml/2006/main" w="0">
-            <a:noFill/>
-          </a:ln>
-        </p:spPr>
-      </p:sp>
-      <p:sp>
-        <p:nvSpPr>
-          <p:cNvPr id="25" name="">
-            <a:extLst xmlns:a="http://schemas.openxmlformats.org/drawingml/2006/main">
-              <a:ext uri="{FF2B5EF4-FFF2-40B4-BE49-F238E27FC236}">
-                <a16:creationId xmlns:a16="http://schemas.microsoft.com/office/drawing/2014/main" id="{5714418A-2F1E-4230-9B8E-ED18BE327551}"/>
-              </a:ext>
-            </a:extLst>
-          </p:cNvPr>
-          <p:cNvSpPr>
-            <a:spLocks xmlns:a="http://schemas.openxmlformats.org/drawingml/2006/main" noGrp="1"/>
-          </p:cNvSpPr>
-          <p:nvPr/>
-        </p:nvSpPr>
-        <p:spPr>
-          <a:xfrm xmlns:a="http://schemas.openxmlformats.org/drawingml/2006/main">
-            <a:off x="1000125" y="5286375"/>
-            <a:ext cx="476250" cy="419100"/>
-          </a:xfrm>
-          <a:prstGeom xmlns:a="http://schemas.openxmlformats.org/drawingml/2006/main" prst="rect">
-            <a:avLst/>
-          </a:prstGeom>
-          <a:noFill xmlns:a="http://schemas.openxmlformats.org/drawingml/2006/main"/>
-          <a:ln xmlns:a="http://schemas.openxmlformats.org/drawingml/2006/main" w="0">
-            <a:noFill/>
-          </a:ln>
-        </p:spPr>
-        <p:txBody>
-          <a:bodyPr xmlns:a="http://schemas.openxmlformats.org/drawingml/2006/main" anchor="ctr">
-            <a:normAutofit fontScale="100000"/>
-          </a:bodyPr>
-          <a:lstStyle xmlns:a="http://schemas.openxmlformats.org/drawingml/2006/main"/>
-          <a:p xmlns:a="http://schemas.openxmlformats.org/drawingml/2006/main">
-            <a:pPr algn="ctr">
-              <a:defRPr sz="1350" b="1">
-                <a:solidFill>
-                  <a:srgbClr val="FFFFFF"/>
-                </a:solidFill>
-                <a:latin typeface="Arial"/>
-                <a:ea typeface="Arial"/>
-                <a:cs typeface="Arial"/>
-              </a:defRPr>
-            </a:pPr>
-            <a:r>
-              <a:rPr sz="1350" b="1">
-                <a:solidFill>
-                  <a:srgbClr val="FFFFFF"/>
-                </a:solidFill>
-                <a:latin typeface="Arial"/>
-                <a:ea typeface="Arial"/>
-                <a:cs typeface="Arial"/>
-              </a:rPr>
-              <a:t>4</a:t>
-            </a:r>
-          </a:p>
-        </p:txBody>
-      </p:sp>
-      <p:sp>
-        <p:nvSpPr>
-          <p:cNvPr id="26" name="">
-            <a:extLst xmlns:a="http://schemas.openxmlformats.org/drawingml/2006/main">
-              <a:ext uri="{FF2B5EF4-FFF2-40B4-BE49-F238E27FC236}">
-                <a16:creationId xmlns:a16="http://schemas.microsoft.com/office/drawing/2014/main" id="{95AD22C8-9866-42FD-B6A7-816C387012F8}"/>
-              </a:ext>
-            </a:extLst>
-          </p:cNvPr>
-          <p:cNvSpPr>
-            <a:spLocks xmlns:a="http://schemas.openxmlformats.org/drawingml/2006/main" noGrp="1"/>
-          </p:cNvSpPr>
-          <p:nvPr/>
-        </p:nvSpPr>
-        <p:spPr>
-          <a:xfrm xmlns:a="http://schemas.openxmlformats.org/drawingml/2006/main">
-            <a:off x="1714500" y="5191125"/>
-            <a:ext cx="9429750" cy="609600"/>
-          </a:xfrm>
-          <a:prstGeom xmlns:a="http://schemas.openxmlformats.org/drawingml/2006/main" prst="rect">
-            <a:avLst/>
-          </a:prstGeom>
-          <a:noFill xmlns:a="http://schemas.openxmlformats.org/drawingml/2006/main"/>
-          <a:ln xmlns:a="http://schemas.openxmlformats.org/drawingml/2006/main" w="0">
-            <a:noFill/>
-          </a:ln>
-        </p:spPr>
-        <p:txBody>
-          <a:bodyPr xmlns:a="http://schemas.openxmlformats.org/drawingml/2006/main" anchor="ctr">
-            <a:normAutofit fontScale="100000"/>
-          </a:bodyPr>
-          <a:lstStyle xmlns:a="http://schemas.openxmlformats.org/drawingml/2006/main"/>
-          <a:p xmlns:a="http://schemas.openxmlformats.org/drawingml/2006/main">
-            <a:pPr algn="l">
-              <a:defRPr sz="1500" b="1">
-                <a:solidFill>
-                  <a:srgbClr val="2F785D"/>
-                </a:solidFill>
-                <a:latin typeface="Arial"/>
-                <a:ea typeface="Arial"/>
-                <a:cs typeface="Arial"/>
-              </a:defRPr>
-            </a:pPr>
-            <a:r>
-              <a:rPr sz="1500" b="1">
-                <a:solidFill>
-                  <a:srgbClr val="2F785D"/>
-                </a:solidFill>
-                <a:latin typeface="Arial"/>
-                <a:ea typeface="Arial"/>
-                <a:cs typeface="Arial"/>
-              </a:rPr>
-              <a:t>Add the partial products: 282 + 1410 = 1692.</a:t>
+              <a:t>1,692</a:t>
             </a:r>
           </a:p>
         </p:txBody>
@@ -9046,7 +8995,7 @@
     </p:spTree>
     <p:extLst>
       <p:ext uri="{BB962C8B-B14F-4D97-AF65-F5344CB8AC3E}">
-        <p14:creationId xmlns:p14="http://schemas.microsoft.com/office/powerpoint/2010/main" val="800653656"/>
+        <p14:creationId xmlns:p14="http://schemas.microsoft.com/office/powerpoint/2010/main" val="770115619"/>
       </p:ext>
     </p:extLst>
   </p:cSld>
@@ -9129,7 +9078,7 @@
                                           </p:stCondLst>
                                         </p:cTn>
                                         <p:tgtEl>
-                                          <p:spTgt spid="12"/>
+                                          <p:spTgt spid="13"/>
                                         </p:tgtEl>
                                         <p:attrNameLst>
                                           <p:attrName>style.visibility</p:attrName>
@@ -9174,7 +9123,7 @@
                                           </p:stCondLst>
                                         </p:cTn>
                                         <p:tgtEl>
-                                          <p:spTgt spid="13"/>
+                                          <p:spTgt spid="16"/>
                                         </p:tgtEl>
                                         <p:attrNameLst>
                                           <p:attrName>style.visibility</p:attrName>
@@ -9219,7 +9168,7 @@
                                           </p:stCondLst>
                                         </p:cTn>
                                         <p:tgtEl>
-                                          <p:spTgt spid="14"/>
+                                          <p:spTgt spid="19"/>
                                         </p:tgtEl>
                                         <p:attrNameLst>
                                           <p:attrName>style.visibility</p:attrName>
@@ -9264,7 +9213,7 @@
                                           </p:stCondLst>
                                         </p:cTn>
                                         <p:tgtEl>
-                                          <p:spTgt spid="17"/>
+                                          <p:spTgt spid="22"/>
                                         </p:tgtEl>
                                         <p:attrNameLst>
                                           <p:attrName>style.visibility</p:attrName>
@@ -9309,97 +9258,7 @@
                                           </p:stCondLst>
                                         </p:cTn>
                                         <p:tgtEl>
-                                          <p:spTgt spid="20"/>
-                                        </p:tgtEl>
-                                        <p:attrNameLst>
-                                          <p:attrName>style.visibility</p:attrName>
-                                        </p:attrNameLst>
-                                      </p:cBhvr>
-                                      <p:to>
-                                        <p:strVal val="visible"/>
-                                      </p:to>
-                                    </p:set>
-                                  </p:childTnLst>
-                                </p:cTn>
-                              </p:par>
-                            </p:childTnLst>
-                          </p:cTn>
-                        </p:par>
-                      </p:childTnLst>
-                    </p:cTn>
-                  </p:par>
-                  <p:par>
-                    <p:cTn id="27" fill="hold">
-                      <p:stCondLst>
-                        <p:cond delay="indefinite"/>
-                      </p:stCondLst>
-                      <p:childTnLst>
-                        <p:par>
-                          <p:cTn id="28" fill="hold">
-                            <p:stCondLst>
-                              <p:cond delay="0"/>
-                            </p:stCondLst>
-                            <p:childTnLst>
-                              <p:par>
-                                <p:cTn id="29" presetID="1" presetClass="entr" presetSubtype="0" fill="hold" grpId="0" nodeType="clickEffect">
-                                  <p:stCondLst>
-                                    <p:cond delay="0"/>
-                                  </p:stCondLst>
-                                  <p:childTnLst>
-                                    <p:set>
-                                      <p:cBhvr>
-                                        <p:cTn id="30" dur="1" fill="hold">
-                                          <p:stCondLst>
-                                            <p:cond delay="0"/>
-                                          </p:stCondLst>
-                                        </p:cTn>
-                                        <p:tgtEl>
-                                          <p:spTgt spid="23"/>
-                                        </p:tgtEl>
-                                        <p:attrNameLst>
-                                          <p:attrName>style.visibility</p:attrName>
-                                        </p:attrNameLst>
-                                      </p:cBhvr>
-                                      <p:to>
-                                        <p:strVal val="visible"/>
-                                      </p:to>
-                                    </p:set>
-                                  </p:childTnLst>
-                                </p:cTn>
-                              </p:par>
-                            </p:childTnLst>
-                          </p:cTn>
-                        </p:par>
-                      </p:childTnLst>
-                    </p:cTn>
-                  </p:par>
-                  <p:par>
-                    <p:cTn id="31" fill="hold">
-                      <p:stCondLst>
-                        <p:cond delay="indefinite"/>
-                      </p:stCondLst>
-                      <p:childTnLst>
-                        <p:par>
-                          <p:cTn id="32" fill="hold">
-                            <p:stCondLst>
-                              <p:cond delay="0"/>
-                            </p:stCondLst>
-                            <p:childTnLst>
-                              <p:par>
-                                <p:cTn id="33" presetID="1" presetClass="entr" presetSubtype="0" fill="hold" grpId="0" nodeType="clickEffect">
-                                  <p:stCondLst>
-                                    <p:cond delay="0"/>
-                                  </p:stCondLst>
-                                  <p:childTnLst>
-                                    <p:set>
-                                      <p:cBhvr>
-                                        <p:cTn id="34" dur="1" fill="hold">
-                                          <p:stCondLst>
-                                            <p:cond delay="0"/>
-                                          </p:stCondLst>
-                                        </p:cTn>
-                                        <p:tgtEl>
-                                          <p:spTgt spid="26"/>
+                                          <p:spTgt spid="25"/>
                                         </p:tgtEl>
                                         <p:attrNameLst>
                                           <p:attrName>style.visibility</p:attrName>
@@ -9441,13 +9300,11 @@
     </p:tnLst>
     <p:bldLst>
       <p:bldP spid="10" grpId="0"/>
-      <p:bldP spid="12" grpId="0"/>
       <p:bldP spid="13" grpId="0"/>
-      <p:bldP spid="14" grpId="0"/>
-      <p:bldP spid="17" grpId="0"/>
-      <p:bldP spid="20" grpId="0"/>
-      <p:bldP spid="23" grpId="0"/>
-      <p:bldP spid="26" grpId="0"/>
+      <p:bldP spid="16" grpId="0"/>
+      <p:bldP spid="19" grpId="0"/>
+      <p:bldP spid="22" grpId="0"/>
+      <p:bldP spid="25" grpId="0"/>
     </p:bldLst>
   </p:timing>
 </p:sld>
@@ -9477,7 +9334,7 @@
           <p:cNvPr id="15" name="">
             <a:extLst xmlns:a="http://schemas.openxmlformats.org/drawingml/2006/main">
               <a:ext uri="{FF2B5EF4-FFF2-40B4-BE49-F238E27FC236}">
-                <a16:creationId xmlns:a16="http://schemas.microsoft.com/office/drawing/2014/main" id="{0721981D-834B-41C5-9192-000100645F4A}"/>
+                <a16:creationId xmlns:a16="http://schemas.microsoft.com/office/drawing/2014/main" id="{92F798CF-A37A-4ED2-BED3-950945BFDA78}"/>
               </a:ext>
             </a:extLst>
           </p:cNvPr>
@@ -9509,7 +9366,7 @@
           <p:cNvPr id="2" name="">
             <a:extLst xmlns:a="http://schemas.openxmlformats.org/drawingml/2006/main">
               <a:ext uri="{FF2B5EF4-FFF2-40B4-BE49-F238E27FC236}">
-                <a16:creationId xmlns:a16="http://schemas.microsoft.com/office/drawing/2014/main" id="{FBE79873-86D2-4E0D-97EB-9F4042AB7D84}"/>
+                <a16:creationId xmlns:a16="http://schemas.microsoft.com/office/drawing/2014/main" id="{89A2EA95-FB7B-4DBB-A435-EFF0762A6F00}"/>
               </a:ext>
             </a:extLst>
           </p:cNvPr>
@@ -9566,7 +9423,7 @@
           <p:cNvPr id="3" name="">
             <a:extLst xmlns:a="http://schemas.openxmlformats.org/drawingml/2006/main">
               <a:ext uri="{FF2B5EF4-FFF2-40B4-BE49-F238E27FC236}">
-                <a16:creationId xmlns:a16="http://schemas.microsoft.com/office/drawing/2014/main" id="{7EA966D5-9DC4-4DBB-9F92-7F7BE4248ECA}"/>
+                <a16:creationId xmlns:a16="http://schemas.microsoft.com/office/drawing/2014/main" id="{860332EA-57F6-49B4-AC00-889C9ABB920B}"/>
               </a:ext>
             </a:extLst>
           </p:cNvPr>
@@ -9598,7 +9455,7 @@
           <p:cNvPr id="4" name="">
             <a:extLst xmlns:a="http://schemas.openxmlformats.org/drawingml/2006/main">
               <a:ext uri="{FF2B5EF4-FFF2-40B4-BE49-F238E27FC236}">
-                <a16:creationId xmlns:a16="http://schemas.microsoft.com/office/drawing/2014/main" id="{679B6A37-720D-4B52-AD25-3D140D1FF18D}"/>
+                <a16:creationId xmlns:a16="http://schemas.microsoft.com/office/drawing/2014/main" id="{EF7FED10-8A5C-4808-B6DF-448DBE32DC8B}"/>
               </a:ext>
             </a:extLst>
           </p:cNvPr>
@@ -9655,7 +9512,7 @@
           <p:cNvPr id="5" name="">
             <a:extLst xmlns:a="http://schemas.openxmlformats.org/drawingml/2006/main">
               <a:ext uri="{FF2B5EF4-FFF2-40B4-BE49-F238E27FC236}">
-                <a16:creationId xmlns:a16="http://schemas.microsoft.com/office/drawing/2014/main" id="{756AE444-8A0C-4DA1-9846-0FF609319477}"/>
+                <a16:creationId xmlns:a16="http://schemas.microsoft.com/office/drawing/2014/main" id="{90A02D49-B397-4D53-8189-B736A5165777}"/>
               </a:ext>
             </a:extLst>
           </p:cNvPr>
@@ -9712,7 +9569,7 @@
           <p:cNvPr id="6" name="">
             <a:extLst xmlns:a="http://schemas.openxmlformats.org/drawingml/2006/main">
               <a:ext uri="{FF2B5EF4-FFF2-40B4-BE49-F238E27FC236}">
-                <a16:creationId xmlns:a16="http://schemas.microsoft.com/office/drawing/2014/main" id="{38296294-183C-41F9-96BB-BF6D2372EF4C}"/>
+                <a16:creationId xmlns:a16="http://schemas.microsoft.com/office/drawing/2014/main" id="{4FA979E4-753A-44E1-A21F-BF3EAB6A3A5E}"/>
               </a:ext>
             </a:extLst>
           </p:cNvPr>
@@ -9769,7 +9626,7 @@
           <p:cNvPr id="7" name="">
             <a:extLst xmlns:a="http://schemas.openxmlformats.org/drawingml/2006/main">
               <a:ext uri="{FF2B5EF4-FFF2-40B4-BE49-F238E27FC236}">
-                <a16:creationId xmlns:a16="http://schemas.microsoft.com/office/drawing/2014/main" id="{D1331C90-8EFD-4DDD-B337-C4D9798B0695}"/>
+                <a16:creationId xmlns:a16="http://schemas.microsoft.com/office/drawing/2014/main" id="{BDF0A121-05CD-4DE1-AEC0-A1AD0AEC3EA2}"/>
               </a:ext>
             </a:extLst>
           </p:cNvPr>
@@ -9801,7 +9658,7 @@
           <p:cNvPr id="8" name="">
             <a:extLst xmlns:a="http://schemas.openxmlformats.org/drawingml/2006/main">
               <a:ext uri="{FF2B5EF4-FFF2-40B4-BE49-F238E27FC236}">
-                <a16:creationId xmlns:a16="http://schemas.microsoft.com/office/drawing/2014/main" id="{4C70616C-D6A3-4E00-8F01-422504A83BD6}"/>
+                <a16:creationId xmlns:a16="http://schemas.microsoft.com/office/drawing/2014/main" id="{1ACDB8BD-B889-4A56-81C6-1A63B7039054}"/>
               </a:ext>
             </a:extLst>
           </p:cNvPr>
@@ -9858,7 +9715,7 @@
           <p:cNvPr id="9" name="">
             <a:extLst xmlns:a="http://schemas.openxmlformats.org/drawingml/2006/main">
               <a:ext uri="{FF2B5EF4-FFF2-40B4-BE49-F238E27FC236}">
-                <a16:creationId xmlns:a16="http://schemas.microsoft.com/office/drawing/2014/main" id="{425506C5-0DE7-4AF1-A48F-84A064E87795}"/>
+                <a16:creationId xmlns:a16="http://schemas.microsoft.com/office/drawing/2014/main" id="{33A6F421-DCE3-4D79-A0BA-9968C37CF5B1}"/>
               </a:ext>
             </a:extLst>
           </p:cNvPr>
@@ -9915,7 +9772,7 @@
           <p:cNvPr id="10" name="">
             <a:extLst xmlns:a="http://schemas.openxmlformats.org/drawingml/2006/main">
               <a:ext uri="{FF2B5EF4-FFF2-40B4-BE49-F238E27FC236}">
-                <a16:creationId xmlns:a16="http://schemas.microsoft.com/office/drawing/2014/main" id="{05AE88E6-5E14-46A0-891A-F0CBF5791082}"/>
+                <a16:creationId xmlns:a16="http://schemas.microsoft.com/office/drawing/2014/main" id="{0AF2F64A-F9AE-42DE-807C-FD069C1FFB70}"/>
               </a:ext>
             </a:extLst>
           </p:cNvPr>
@@ -9972,7 +9829,7 @@
           <p:cNvPr id="11" name="">
             <a:extLst xmlns:a="http://schemas.openxmlformats.org/drawingml/2006/main">
               <a:ext uri="{FF2B5EF4-FFF2-40B4-BE49-F238E27FC236}">
-                <a16:creationId xmlns:a16="http://schemas.microsoft.com/office/drawing/2014/main" id="{14C97169-5905-4F60-B6A5-1F8BA3169F27}"/>
+                <a16:creationId xmlns:a16="http://schemas.microsoft.com/office/drawing/2014/main" id="{75F92DAF-228E-414C-AA65-407ADE737F80}"/>
               </a:ext>
             </a:extLst>
           </p:cNvPr>
@@ -10029,7 +9886,7 @@
           <p:cNvPr id="12" name="">
             <a:extLst xmlns:a="http://schemas.openxmlformats.org/drawingml/2006/main">
               <a:ext uri="{FF2B5EF4-FFF2-40B4-BE49-F238E27FC236}">
-                <a16:creationId xmlns:a16="http://schemas.microsoft.com/office/drawing/2014/main" id="{4B48FE43-0AED-4F7F-9347-A7B85B9BA654}"/>
+                <a16:creationId xmlns:a16="http://schemas.microsoft.com/office/drawing/2014/main" id="{C14ED957-D9C1-4E86-A841-72DF6D4D2950}"/>
               </a:ext>
             </a:extLst>
           </p:cNvPr>
@@ -10061,7 +9918,7 @@
           <p:cNvPr id="13" name="">
             <a:extLst xmlns:a="http://schemas.openxmlformats.org/drawingml/2006/main">
               <a:ext uri="{FF2B5EF4-FFF2-40B4-BE49-F238E27FC236}">
-                <a16:creationId xmlns:a16="http://schemas.microsoft.com/office/drawing/2014/main" id="{66AD0FE7-EF6C-4DEE-B7CA-164F0E8A1D66}"/>
+                <a16:creationId xmlns:a16="http://schemas.microsoft.com/office/drawing/2014/main" id="{27FF7F4C-9D9E-49D2-ABE5-2F247A8682FF}"/>
               </a:ext>
             </a:extLst>
           </p:cNvPr>
@@ -10118,7 +9975,7 @@
           <p:cNvPr id="14" name="">
             <a:extLst xmlns:a="http://schemas.openxmlformats.org/drawingml/2006/main">
               <a:ext uri="{FF2B5EF4-FFF2-40B4-BE49-F238E27FC236}">
-                <a16:creationId xmlns:a16="http://schemas.microsoft.com/office/drawing/2014/main" id="{68D22C00-97AC-42D5-8FA7-B3AB2CDC2D94}"/>
+                <a16:creationId xmlns:a16="http://schemas.microsoft.com/office/drawing/2014/main" id="{35C2E086-DD9B-455F-98CE-8576C743E7C5}"/>
               </a:ext>
             </a:extLst>
           </p:cNvPr>
@@ -10173,7 +10030,7 @@
     </p:spTree>
     <p:extLst>
       <p:ext uri="{BB962C8B-B14F-4D97-AF65-F5344CB8AC3E}">
-        <p14:creationId xmlns:p14="http://schemas.microsoft.com/office/powerpoint/2010/main" val="403125089"/>
+        <p14:creationId xmlns:p14="http://schemas.microsoft.com/office/powerpoint/2010/main" val="1888706065"/>
       </p:ext>
     </p:extLst>
   </p:cSld>
@@ -10374,7 +10231,7 @@
           <p:cNvPr id="16" name="">
             <a:extLst xmlns:a="http://schemas.openxmlformats.org/drawingml/2006/main">
               <a:ext uri="{FF2B5EF4-FFF2-40B4-BE49-F238E27FC236}">
-                <a16:creationId xmlns:a16="http://schemas.microsoft.com/office/drawing/2014/main" id="{E809E809-72A0-402A-952E-339FE515316E}"/>
+                <a16:creationId xmlns:a16="http://schemas.microsoft.com/office/drawing/2014/main" id="{2227463E-3613-4809-BDFF-85DA7DEDD7B6}"/>
               </a:ext>
             </a:extLst>
           </p:cNvPr>
@@ -10406,7 +10263,7 @@
           <p:cNvPr id="2" name="">
             <a:extLst xmlns:a="http://schemas.openxmlformats.org/drawingml/2006/main">
               <a:ext uri="{FF2B5EF4-FFF2-40B4-BE49-F238E27FC236}">
-                <a16:creationId xmlns:a16="http://schemas.microsoft.com/office/drawing/2014/main" id="{C330CEB5-A003-42E4-B672-00D1675C2171}"/>
+                <a16:creationId xmlns:a16="http://schemas.microsoft.com/office/drawing/2014/main" id="{065C3055-BB25-4304-AFEB-96705660A2BB}"/>
               </a:ext>
             </a:extLst>
           </p:cNvPr>
@@ -10463,7 +10320,7 @@
           <p:cNvPr id="3" name="">
             <a:extLst xmlns:a="http://schemas.openxmlformats.org/drawingml/2006/main">
               <a:ext uri="{FF2B5EF4-FFF2-40B4-BE49-F238E27FC236}">
-                <a16:creationId xmlns:a16="http://schemas.microsoft.com/office/drawing/2014/main" id="{14EEDC76-5A81-43CF-AB71-45E350AE1428}"/>
+                <a16:creationId xmlns:a16="http://schemas.microsoft.com/office/drawing/2014/main" id="{66079B21-D763-4F93-989F-0158CCB1C13A}"/>
               </a:ext>
             </a:extLst>
           </p:cNvPr>
@@ -10495,7 +10352,7 @@
           <p:cNvPr id="4" name="">
             <a:extLst xmlns:a="http://schemas.openxmlformats.org/drawingml/2006/main">
               <a:ext uri="{FF2B5EF4-FFF2-40B4-BE49-F238E27FC236}">
-                <a16:creationId xmlns:a16="http://schemas.microsoft.com/office/drawing/2014/main" id="{A2926059-6326-458B-B5D4-362A0FC732CE}"/>
+                <a16:creationId xmlns:a16="http://schemas.microsoft.com/office/drawing/2014/main" id="{69BCE91A-F5AF-4425-8066-C53E50E7F8F7}"/>
               </a:ext>
             </a:extLst>
           </p:cNvPr>
@@ -10552,7 +10409,7 @@
           <p:cNvPr id="5" name="">
             <a:extLst xmlns:a="http://schemas.openxmlformats.org/drawingml/2006/main">
               <a:ext uri="{FF2B5EF4-FFF2-40B4-BE49-F238E27FC236}">
-                <a16:creationId xmlns:a16="http://schemas.microsoft.com/office/drawing/2014/main" id="{71D191D5-0DE9-4C16-92A0-6A4BEC7E3F28}"/>
+                <a16:creationId xmlns:a16="http://schemas.microsoft.com/office/drawing/2014/main" id="{F975CC61-23B0-4A3E-A09E-90895D5D7B9B}"/>
               </a:ext>
             </a:extLst>
           </p:cNvPr>
@@ -10609,7 +10466,7 @@
           <p:cNvPr id="6" name="">
             <a:extLst xmlns:a="http://schemas.openxmlformats.org/drawingml/2006/main">
               <a:ext uri="{FF2B5EF4-FFF2-40B4-BE49-F238E27FC236}">
-                <a16:creationId xmlns:a16="http://schemas.microsoft.com/office/drawing/2014/main" id="{C800A48F-B1F6-4E36-91AD-D2E11648924A}"/>
+                <a16:creationId xmlns:a16="http://schemas.microsoft.com/office/drawing/2014/main" id="{0DDACFC9-F13A-461A-8F0A-D29E1399F724}"/>
               </a:ext>
             </a:extLst>
           </p:cNvPr>
@@ -10666,7 +10523,7 @@
           <p:cNvPr id="7" name="">
             <a:extLst xmlns:a="http://schemas.openxmlformats.org/drawingml/2006/main">
               <a:ext uri="{FF2B5EF4-FFF2-40B4-BE49-F238E27FC236}">
-                <a16:creationId xmlns:a16="http://schemas.microsoft.com/office/drawing/2014/main" id="{9852159B-556E-4D06-90A3-752538FED821}"/>
+                <a16:creationId xmlns:a16="http://schemas.microsoft.com/office/drawing/2014/main" id="{3A172776-58FE-41C6-BEF0-B84E7CAF62BE}"/>
               </a:ext>
             </a:extLst>
           </p:cNvPr>
@@ -10698,7 +10555,7 @@
           <p:cNvPr id="8" name="">
             <a:extLst xmlns:a="http://schemas.openxmlformats.org/drawingml/2006/main">
               <a:ext uri="{FF2B5EF4-FFF2-40B4-BE49-F238E27FC236}">
-                <a16:creationId xmlns:a16="http://schemas.microsoft.com/office/drawing/2014/main" id="{C362D894-255F-461B-9C7F-A942B1B3532B}"/>
+                <a16:creationId xmlns:a16="http://schemas.microsoft.com/office/drawing/2014/main" id="{101685D2-67EB-41F6-A47B-120E2A76BB99}"/>
               </a:ext>
             </a:extLst>
           </p:cNvPr>
@@ -10755,7 +10612,7 @@
           <p:cNvPr id="9" name="">
             <a:extLst xmlns:a="http://schemas.openxmlformats.org/drawingml/2006/main">
               <a:ext uri="{FF2B5EF4-FFF2-40B4-BE49-F238E27FC236}">
-                <a16:creationId xmlns:a16="http://schemas.microsoft.com/office/drawing/2014/main" id="{18432BAF-2B6F-4FCF-A8F8-5C75A1CDAFCC}"/>
+                <a16:creationId xmlns:a16="http://schemas.microsoft.com/office/drawing/2014/main" id="{FD993CA9-B593-4B74-842C-FB3816C8F778}"/>
               </a:ext>
             </a:extLst>
           </p:cNvPr>
@@ -10812,7 +10669,7 @@
           <p:cNvPr id="10" name="">
             <a:extLst xmlns:a="http://schemas.openxmlformats.org/drawingml/2006/main">
               <a:ext uri="{FF2B5EF4-FFF2-40B4-BE49-F238E27FC236}">
-                <a16:creationId xmlns:a16="http://schemas.microsoft.com/office/drawing/2014/main" id="{7812EA3A-53CF-41EC-A7FE-1CC5759439EC}"/>
+                <a16:creationId xmlns:a16="http://schemas.microsoft.com/office/drawing/2014/main" id="{B34FEFAE-0930-4006-AA03-0BC8EBE7F025}"/>
               </a:ext>
             </a:extLst>
           </p:cNvPr>
@@ -10869,7 +10726,7 @@
           <p:cNvPr id="11" name="">
             <a:extLst xmlns:a="http://schemas.openxmlformats.org/drawingml/2006/main">
               <a:ext uri="{FF2B5EF4-FFF2-40B4-BE49-F238E27FC236}">
-                <a16:creationId xmlns:a16="http://schemas.microsoft.com/office/drawing/2014/main" id="{313C63F8-D375-44B9-B7F2-CF67A51D290C}"/>
+                <a16:creationId xmlns:a16="http://schemas.microsoft.com/office/drawing/2014/main" id="{D8C97486-E246-4015-A6F3-36BB4092AB7E}"/>
               </a:ext>
             </a:extLst>
           </p:cNvPr>
@@ -10926,7 +10783,7 @@
           <p:cNvPr id="12" name="">
             <a:extLst xmlns:a="http://schemas.openxmlformats.org/drawingml/2006/main">
               <a:ext uri="{FF2B5EF4-FFF2-40B4-BE49-F238E27FC236}">
-                <a16:creationId xmlns:a16="http://schemas.microsoft.com/office/drawing/2014/main" id="{56559571-DB71-44B5-B39B-7ACB80C03AE9}"/>
+                <a16:creationId xmlns:a16="http://schemas.microsoft.com/office/drawing/2014/main" id="{5E0ADB2B-8A27-40A9-90C6-24BB7B2775B9}"/>
               </a:ext>
             </a:extLst>
           </p:cNvPr>
@@ -10983,7 +10840,7 @@
           <p:cNvPr id="13" name="">
             <a:extLst xmlns:a="http://schemas.openxmlformats.org/drawingml/2006/main">
               <a:ext uri="{FF2B5EF4-FFF2-40B4-BE49-F238E27FC236}">
-                <a16:creationId xmlns:a16="http://schemas.microsoft.com/office/drawing/2014/main" id="{230596C7-20EE-498A-B2E4-966C251780EE}"/>
+                <a16:creationId xmlns:a16="http://schemas.microsoft.com/office/drawing/2014/main" id="{511B27C2-2452-421B-AA5C-53CC8356BD18}"/>
               </a:ext>
             </a:extLst>
           </p:cNvPr>
@@ -11040,7 +10897,7 @@
           <p:cNvPr id="14" name="">
             <a:extLst xmlns:a="http://schemas.openxmlformats.org/drawingml/2006/main">
               <a:ext uri="{FF2B5EF4-FFF2-40B4-BE49-F238E27FC236}">
-                <a16:creationId xmlns:a16="http://schemas.microsoft.com/office/drawing/2014/main" id="{1C5647AF-7F4F-4475-8506-C4F493583431}"/>
+                <a16:creationId xmlns:a16="http://schemas.microsoft.com/office/drawing/2014/main" id="{A106B457-6A39-4F2A-9AD6-C1F859555A2B}"/>
               </a:ext>
             </a:extLst>
           </p:cNvPr>
@@ -11097,7 +10954,7 @@
           <p:cNvPr id="15" name="">
             <a:extLst xmlns:a="http://schemas.openxmlformats.org/drawingml/2006/main">
               <a:ext uri="{FF2B5EF4-FFF2-40B4-BE49-F238E27FC236}">
-                <a16:creationId xmlns:a16="http://schemas.microsoft.com/office/drawing/2014/main" id="{5F3355D1-00B0-4D01-A4F3-9994411556B2}"/>
+                <a16:creationId xmlns:a16="http://schemas.microsoft.com/office/drawing/2014/main" id="{D01287B4-E112-4144-A48A-B18FDB88BD43}"/>
               </a:ext>
             </a:extLst>
           </p:cNvPr>
@@ -11152,7 +11009,7 @@
     </p:spTree>
     <p:extLst>
       <p:ext uri="{BB962C8B-B14F-4D97-AF65-F5344CB8AC3E}">
-        <p14:creationId xmlns:p14="http://schemas.microsoft.com/office/powerpoint/2010/main" val="1666232745"/>
+        <p14:creationId xmlns:p14="http://schemas.microsoft.com/office/powerpoint/2010/main" val="1837784161"/>
       </p:ext>
     </p:extLst>
   </p:cSld>
@@ -11307,7 +11164,7 @@
           <p:cNvPr id="16" name="">
             <a:extLst xmlns:a="http://schemas.openxmlformats.org/drawingml/2006/main">
               <a:ext uri="{FF2B5EF4-FFF2-40B4-BE49-F238E27FC236}">
-                <a16:creationId xmlns:a16="http://schemas.microsoft.com/office/drawing/2014/main" id="{FD17830B-F866-4D33-A3DA-F27C6333AAF3}"/>
+                <a16:creationId xmlns:a16="http://schemas.microsoft.com/office/drawing/2014/main" id="{7FE4DEBA-EC19-4BA6-86C8-F5908F410F94}"/>
               </a:ext>
             </a:extLst>
           </p:cNvPr>
@@ -11339,7 +11196,7 @@
           <p:cNvPr id="2" name="">
             <a:extLst xmlns:a="http://schemas.openxmlformats.org/drawingml/2006/main">
               <a:ext uri="{FF2B5EF4-FFF2-40B4-BE49-F238E27FC236}">
-                <a16:creationId xmlns:a16="http://schemas.microsoft.com/office/drawing/2014/main" id="{D6ECC9A3-D5D6-4F87-B8D2-DD2511CDFBD9}"/>
+                <a16:creationId xmlns:a16="http://schemas.microsoft.com/office/drawing/2014/main" id="{B09B43C1-F9CA-47F0-97C0-31FBF0FD3E30}"/>
               </a:ext>
             </a:extLst>
           </p:cNvPr>
@@ -11396,7 +11253,7 @@
           <p:cNvPr id="3" name="">
             <a:extLst xmlns:a="http://schemas.openxmlformats.org/drawingml/2006/main">
               <a:ext uri="{FF2B5EF4-FFF2-40B4-BE49-F238E27FC236}">
-                <a16:creationId xmlns:a16="http://schemas.microsoft.com/office/drawing/2014/main" id="{979B9162-4863-48BF-A729-6875D978190B}"/>
+                <a16:creationId xmlns:a16="http://schemas.microsoft.com/office/drawing/2014/main" id="{C76E012D-688A-4D53-BBBA-BF23D0770626}"/>
               </a:ext>
             </a:extLst>
           </p:cNvPr>
@@ -11428,7 +11285,7 @@
           <p:cNvPr id="4" name="">
             <a:extLst xmlns:a="http://schemas.openxmlformats.org/drawingml/2006/main">
               <a:ext uri="{FF2B5EF4-FFF2-40B4-BE49-F238E27FC236}">
-                <a16:creationId xmlns:a16="http://schemas.microsoft.com/office/drawing/2014/main" id="{1EE6F3F3-9AE7-49F7-9205-34167E3B920A}"/>
+                <a16:creationId xmlns:a16="http://schemas.microsoft.com/office/drawing/2014/main" id="{33834D3C-960A-4EC3-BA10-667251C2B182}"/>
               </a:ext>
             </a:extLst>
           </p:cNvPr>
@@ -11485,7 +11342,7 @@
           <p:cNvPr id="5" name="">
             <a:extLst xmlns:a="http://schemas.openxmlformats.org/drawingml/2006/main">
               <a:ext uri="{FF2B5EF4-FFF2-40B4-BE49-F238E27FC236}">
-                <a16:creationId xmlns:a16="http://schemas.microsoft.com/office/drawing/2014/main" id="{C1DDD541-A533-492A-9C3F-DF7571AC161A}"/>
+                <a16:creationId xmlns:a16="http://schemas.microsoft.com/office/drawing/2014/main" id="{4683642B-3427-495B-B37F-B97790E3DCB4}"/>
               </a:ext>
             </a:extLst>
           </p:cNvPr>
@@ -11542,7 +11399,7 @@
           <p:cNvPr id="6" name="">
             <a:extLst xmlns:a="http://schemas.openxmlformats.org/drawingml/2006/main">
               <a:ext uri="{FF2B5EF4-FFF2-40B4-BE49-F238E27FC236}">
-                <a16:creationId xmlns:a16="http://schemas.microsoft.com/office/drawing/2014/main" id="{11A0CE58-A9D9-4B9D-B8BB-2763CD06B05A}"/>
+                <a16:creationId xmlns:a16="http://schemas.microsoft.com/office/drawing/2014/main" id="{E986E310-A94C-4AAF-B466-1D77E4DA5C1B}"/>
               </a:ext>
             </a:extLst>
           </p:cNvPr>
@@ -11599,7 +11456,7 @@
           <p:cNvPr id="7" name="">
             <a:extLst xmlns:a="http://schemas.openxmlformats.org/drawingml/2006/main">
               <a:ext uri="{FF2B5EF4-FFF2-40B4-BE49-F238E27FC236}">
-                <a16:creationId xmlns:a16="http://schemas.microsoft.com/office/drawing/2014/main" id="{79FEFBAF-C7F9-473B-A1FA-847E6C5B9B3A}"/>
+                <a16:creationId xmlns:a16="http://schemas.microsoft.com/office/drawing/2014/main" id="{AA701CB7-836F-4F63-A0E8-2D7917C012FA}"/>
               </a:ext>
             </a:extLst>
           </p:cNvPr>
@@ -11631,7 +11488,7 @@
           <p:cNvPr id="8" name="">
             <a:extLst xmlns:a="http://schemas.openxmlformats.org/drawingml/2006/main">
               <a:ext uri="{FF2B5EF4-FFF2-40B4-BE49-F238E27FC236}">
-                <a16:creationId xmlns:a16="http://schemas.microsoft.com/office/drawing/2014/main" id="{7454E188-ADA7-445A-B38B-B1C1B02C7B8C}"/>
+                <a16:creationId xmlns:a16="http://schemas.microsoft.com/office/drawing/2014/main" id="{4DA2B581-D938-4167-AB62-7C4AA7BA470A}"/>
               </a:ext>
             </a:extLst>
           </p:cNvPr>
@@ -11688,7 +11545,7 @@
           <p:cNvPr id="9" name="">
             <a:extLst xmlns:a="http://schemas.openxmlformats.org/drawingml/2006/main">
               <a:ext uri="{FF2B5EF4-FFF2-40B4-BE49-F238E27FC236}">
-                <a16:creationId xmlns:a16="http://schemas.microsoft.com/office/drawing/2014/main" id="{58371219-6F98-4E6B-9A9A-BE6CC09CC8E7}"/>
+                <a16:creationId xmlns:a16="http://schemas.microsoft.com/office/drawing/2014/main" id="{911E5D21-FEB3-404B-BFA7-EB475DDB6EBC}"/>
               </a:ext>
             </a:extLst>
           </p:cNvPr>
@@ -11749,7 +11606,7 @@
           <p:nvPr/>
         </p:nvPicPr>
         <p:blipFill>
-          <a:blip xmlns:r="http://schemas.openxmlformats.org/officeDocument/2006/relationships" xmlns:a="http://schemas.openxmlformats.org/drawingml/2006/main" r:embed="Rde9b98ddb3214316"/>
+          <a:blip xmlns:r="http://schemas.openxmlformats.org/officeDocument/2006/relationships" xmlns:a="http://schemas.openxmlformats.org/drawingml/2006/main" r:embed="Rc2f4c2df63ec40e4"/>
           <a:stretch xmlns:a="http://schemas.openxmlformats.org/drawingml/2006/main"/>
         </p:blipFill>
         <p:spPr>
@@ -11767,7 +11624,7 @@
           <p:cNvPr id="11" name="">
             <a:extLst xmlns:a="http://schemas.openxmlformats.org/drawingml/2006/main">
               <a:ext uri="{FF2B5EF4-FFF2-40B4-BE49-F238E27FC236}">
-                <a16:creationId xmlns:a16="http://schemas.microsoft.com/office/drawing/2014/main" id="{A4EA47A1-ED57-4C94-831C-FE4E22133569}"/>
+                <a16:creationId xmlns:a16="http://schemas.microsoft.com/office/drawing/2014/main" id="{4A438D7B-ECBE-40AD-9A61-6DFFDBF59FE8}"/>
               </a:ext>
             </a:extLst>
           </p:cNvPr>
@@ -11824,7 +11681,7 @@
           <p:cNvPr id="12" name="">
             <a:extLst xmlns:a="http://schemas.openxmlformats.org/drawingml/2006/main">
               <a:ext uri="{FF2B5EF4-FFF2-40B4-BE49-F238E27FC236}">
-                <a16:creationId xmlns:a16="http://schemas.microsoft.com/office/drawing/2014/main" id="{78DC52BA-467A-4136-83A9-D0AB76591244}"/>
+                <a16:creationId xmlns:a16="http://schemas.microsoft.com/office/drawing/2014/main" id="{167E17F3-5981-472C-B9B1-6FF32D8C15C7}"/>
               </a:ext>
             </a:extLst>
           </p:cNvPr>
@@ -11881,7 +11738,7 @@
           <p:cNvPr id="13" name="">
             <a:extLst xmlns:a="http://schemas.openxmlformats.org/drawingml/2006/main">
               <a:ext uri="{FF2B5EF4-FFF2-40B4-BE49-F238E27FC236}">
-                <a16:creationId xmlns:a16="http://schemas.microsoft.com/office/drawing/2014/main" id="{D90DE826-EC8B-4107-9DD7-7D097A520A2E}"/>
+                <a16:creationId xmlns:a16="http://schemas.microsoft.com/office/drawing/2014/main" id="{89B9BAC8-D5C5-4C8C-90EC-5F45FD64FBFD}"/>
               </a:ext>
             </a:extLst>
           </p:cNvPr>
@@ -11913,7 +11770,7 @@
           <p:cNvPr id="14" name="">
             <a:extLst xmlns:a="http://schemas.openxmlformats.org/drawingml/2006/main">
               <a:ext uri="{FF2B5EF4-FFF2-40B4-BE49-F238E27FC236}">
-                <a16:creationId xmlns:a16="http://schemas.microsoft.com/office/drawing/2014/main" id="{20F04EDB-78B1-4E3B-BDFC-DACBAAF234C1}"/>
+                <a16:creationId xmlns:a16="http://schemas.microsoft.com/office/drawing/2014/main" id="{AF875730-852B-4E2D-A99E-656EC738EE3E}"/>
               </a:ext>
             </a:extLst>
           </p:cNvPr>
@@ -11970,7 +11827,7 @@
           <p:cNvPr id="15" name="">
             <a:extLst xmlns:a="http://schemas.openxmlformats.org/drawingml/2006/main">
               <a:ext uri="{FF2B5EF4-FFF2-40B4-BE49-F238E27FC236}">
-                <a16:creationId xmlns:a16="http://schemas.microsoft.com/office/drawing/2014/main" id="{2FE23207-A691-457D-9B6A-CBA9ADC5B984}"/>
+                <a16:creationId xmlns:a16="http://schemas.microsoft.com/office/drawing/2014/main" id="{27373BC4-41E9-4F3A-8DEE-8EF15ADE6C78}"/>
               </a:ext>
             </a:extLst>
           </p:cNvPr>
@@ -12025,7 +11882,7 @@
     </p:spTree>
     <p:extLst>
       <p:ext uri="{BB962C8B-B14F-4D97-AF65-F5344CB8AC3E}">
-        <p14:creationId xmlns:p14="http://schemas.microsoft.com/office/powerpoint/2010/main" val="2064716799"/>
+        <p14:creationId xmlns:p14="http://schemas.microsoft.com/office/powerpoint/2010/main" val="1330554276"/>
       </p:ext>
     </p:extLst>
   </p:cSld>
@@ -12180,7 +12037,7 @@
           <p:cNvPr id="23" name="">
             <a:extLst xmlns:a="http://schemas.openxmlformats.org/drawingml/2006/main">
               <a:ext uri="{FF2B5EF4-FFF2-40B4-BE49-F238E27FC236}">
-                <a16:creationId xmlns:a16="http://schemas.microsoft.com/office/drawing/2014/main" id="{73F478DF-9972-4302-B95C-8565E8FF475E}"/>
+                <a16:creationId xmlns:a16="http://schemas.microsoft.com/office/drawing/2014/main" id="{DCA4F8F1-50C9-40CD-A6CE-A827F5AD0945}"/>
               </a:ext>
             </a:extLst>
           </p:cNvPr>
@@ -12212,7 +12069,7 @@
           <p:cNvPr id="2" name="">
             <a:extLst xmlns:a="http://schemas.openxmlformats.org/drawingml/2006/main">
               <a:ext uri="{FF2B5EF4-FFF2-40B4-BE49-F238E27FC236}">
-                <a16:creationId xmlns:a16="http://schemas.microsoft.com/office/drawing/2014/main" id="{F91E76F3-10B5-4AB0-8A6D-E0F9C2AF3077}"/>
+                <a16:creationId xmlns:a16="http://schemas.microsoft.com/office/drawing/2014/main" id="{1FA77C6E-03E3-4DF7-A272-946BB0DBE439}"/>
               </a:ext>
             </a:extLst>
           </p:cNvPr>
@@ -12269,7 +12126,7 @@
           <p:cNvPr id="3" name="">
             <a:extLst xmlns:a="http://schemas.openxmlformats.org/drawingml/2006/main">
               <a:ext uri="{FF2B5EF4-FFF2-40B4-BE49-F238E27FC236}">
-                <a16:creationId xmlns:a16="http://schemas.microsoft.com/office/drawing/2014/main" id="{726CA8CF-1A3D-44EC-8321-69A64105C299}"/>
+                <a16:creationId xmlns:a16="http://schemas.microsoft.com/office/drawing/2014/main" id="{5D4E6AC7-7363-4268-A543-F22CC4A79DF8}"/>
               </a:ext>
             </a:extLst>
           </p:cNvPr>
@@ -12301,7 +12158,7 @@
           <p:cNvPr id="4" name="">
             <a:extLst xmlns:a="http://schemas.openxmlformats.org/drawingml/2006/main">
               <a:ext uri="{FF2B5EF4-FFF2-40B4-BE49-F238E27FC236}">
-                <a16:creationId xmlns:a16="http://schemas.microsoft.com/office/drawing/2014/main" id="{D50E1C3E-3847-4AD9-A7F0-7437CD57C7D8}"/>
+                <a16:creationId xmlns:a16="http://schemas.microsoft.com/office/drawing/2014/main" id="{03C0A5A6-97D3-47E5-A911-2BABDE490811}"/>
               </a:ext>
             </a:extLst>
           </p:cNvPr>
@@ -12358,7 +12215,7 @@
           <p:cNvPr id="5" name="">
             <a:extLst xmlns:a="http://schemas.openxmlformats.org/drawingml/2006/main">
               <a:ext uri="{FF2B5EF4-FFF2-40B4-BE49-F238E27FC236}">
-                <a16:creationId xmlns:a16="http://schemas.microsoft.com/office/drawing/2014/main" id="{4948A427-4A7F-4901-8FF1-67B6D7AFCD13}"/>
+                <a16:creationId xmlns:a16="http://schemas.microsoft.com/office/drawing/2014/main" id="{855D7EEF-9695-4C2B-BCF0-B2F304E62961}"/>
               </a:ext>
             </a:extLst>
           </p:cNvPr>
@@ -12415,7 +12272,7 @@
           <p:cNvPr id="6" name="">
             <a:extLst xmlns:a="http://schemas.openxmlformats.org/drawingml/2006/main">
               <a:ext uri="{FF2B5EF4-FFF2-40B4-BE49-F238E27FC236}">
-                <a16:creationId xmlns:a16="http://schemas.microsoft.com/office/drawing/2014/main" id="{F861741A-27F8-4194-9D9D-DCF0A5E5A1CA}"/>
+                <a16:creationId xmlns:a16="http://schemas.microsoft.com/office/drawing/2014/main" id="{3361A655-7FAC-410F-A429-AFD1ABB2C775}"/>
               </a:ext>
             </a:extLst>
           </p:cNvPr>
@@ -12472,7 +12329,7 @@
           <p:cNvPr id="7" name="">
             <a:extLst xmlns:a="http://schemas.openxmlformats.org/drawingml/2006/main">
               <a:ext uri="{FF2B5EF4-FFF2-40B4-BE49-F238E27FC236}">
-                <a16:creationId xmlns:a16="http://schemas.microsoft.com/office/drawing/2014/main" id="{E224989E-390F-4CE5-823E-41825D8E055A}"/>
+                <a16:creationId xmlns:a16="http://schemas.microsoft.com/office/drawing/2014/main" id="{531D4DAE-89BA-41A7-8DC2-D67670C27C3A}"/>
               </a:ext>
             </a:extLst>
           </p:cNvPr>
@@ -12504,7 +12361,7 @@
           <p:cNvPr id="8" name="">
             <a:extLst xmlns:a="http://schemas.openxmlformats.org/drawingml/2006/main">
               <a:ext uri="{FF2B5EF4-FFF2-40B4-BE49-F238E27FC236}">
-                <a16:creationId xmlns:a16="http://schemas.microsoft.com/office/drawing/2014/main" id="{C3544F6D-7260-46EA-9CCF-606428634226}"/>
+                <a16:creationId xmlns:a16="http://schemas.microsoft.com/office/drawing/2014/main" id="{0EF34466-BEFF-4613-96F6-5E1AB040311E}"/>
               </a:ext>
             </a:extLst>
           </p:cNvPr>
@@ -12561,7 +12418,7 @@
           <p:cNvPr id="9" name="">
             <a:extLst xmlns:a="http://schemas.openxmlformats.org/drawingml/2006/main">
               <a:ext uri="{FF2B5EF4-FFF2-40B4-BE49-F238E27FC236}">
-                <a16:creationId xmlns:a16="http://schemas.microsoft.com/office/drawing/2014/main" id="{01740C56-27C5-470F-A6FE-9E5BF66DDBE2}"/>
+                <a16:creationId xmlns:a16="http://schemas.microsoft.com/office/drawing/2014/main" id="{1BE87B25-548B-47A3-ADBF-8D86E3605509}"/>
               </a:ext>
             </a:extLst>
           </p:cNvPr>
@@ -12618,7 +12475,7 @@
           <p:cNvPr id="10" name="">
             <a:extLst xmlns:a="http://schemas.openxmlformats.org/drawingml/2006/main">
               <a:ext uri="{FF2B5EF4-FFF2-40B4-BE49-F238E27FC236}">
-                <a16:creationId xmlns:a16="http://schemas.microsoft.com/office/drawing/2014/main" id="{DB2CBDA9-D6E8-4D01-B4B8-D2F92F5ED150}"/>
+                <a16:creationId xmlns:a16="http://schemas.microsoft.com/office/drawing/2014/main" id="{E46184D4-3D44-445A-ADF1-A382B7633DA9}"/>
               </a:ext>
             </a:extLst>
           </p:cNvPr>
@@ -12652,7 +12509,7 @@
           <p:cNvPr id="11" name="">
             <a:extLst xmlns:a="http://schemas.openxmlformats.org/drawingml/2006/main">
               <a:ext uri="{FF2B5EF4-FFF2-40B4-BE49-F238E27FC236}">
-                <a16:creationId xmlns:a16="http://schemas.microsoft.com/office/drawing/2014/main" id="{ED520183-6EF5-42CB-BB1D-183400784988}"/>
+                <a16:creationId xmlns:a16="http://schemas.microsoft.com/office/drawing/2014/main" id="{9286D29A-A472-430A-987D-B626730E5621}"/>
               </a:ext>
             </a:extLst>
           </p:cNvPr>
@@ -12684,7 +12541,7 @@
           <p:cNvPr id="12" name="">
             <a:extLst xmlns:a="http://schemas.openxmlformats.org/drawingml/2006/main">
               <a:ext uri="{FF2B5EF4-FFF2-40B4-BE49-F238E27FC236}">
-                <a16:creationId xmlns:a16="http://schemas.microsoft.com/office/drawing/2014/main" id="{CCEC4725-5F7B-49F9-AC23-505A42C25CD7}"/>
+                <a16:creationId xmlns:a16="http://schemas.microsoft.com/office/drawing/2014/main" id="{5D5EEEFF-CB91-400B-A25C-0255BF271F6A}"/>
               </a:ext>
             </a:extLst>
           </p:cNvPr>
@@ -12741,7 +12598,7 @@
           <p:cNvPr id="13" name="">
             <a:extLst xmlns:a="http://schemas.openxmlformats.org/drawingml/2006/main">
               <a:ext uri="{FF2B5EF4-FFF2-40B4-BE49-F238E27FC236}">
-                <a16:creationId xmlns:a16="http://schemas.microsoft.com/office/drawing/2014/main" id="{32CD6B32-320D-4869-A760-A6606503E639}"/>
+                <a16:creationId xmlns:a16="http://schemas.microsoft.com/office/drawing/2014/main" id="{E2470227-77B0-4059-9BFB-79E2F31C5346}"/>
               </a:ext>
             </a:extLst>
           </p:cNvPr>
@@ -12798,7 +12655,7 @@
           <p:cNvPr id="14" name="">
             <a:extLst xmlns:a="http://schemas.openxmlformats.org/drawingml/2006/main">
               <a:ext uri="{FF2B5EF4-FFF2-40B4-BE49-F238E27FC236}">
-                <a16:creationId xmlns:a16="http://schemas.microsoft.com/office/drawing/2014/main" id="{227201C3-9051-4514-92E5-DC0C70F6DF9D}"/>
+                <a16:creationId xmlns:a16="http://schemas.microsoft.com/office/drawing/2014/main" id="{BC90E1B7-2FFA-4046-92B5-DFAFD734AAA2}"/>
               </a:ext>
             </a:extLst>
           </p:cNvPr>
@@ -12832,7 +12689,7 @@
           <p:cNvPr id="15" name="">
             <a:extLst xmlns:a="http://schemas.openxmlformats.org/drawingml/2006/main">
               <a:ext uri="{FF2B5EF4-FFF2-40B4-BE49-F238E27FC236}">
-                <a16:creationId xmlns:a16="http://schemas.microsoft.com/office/drawing/2014/main" id="{55482402-D351-4E22-AE91-EB23E82F9DCB}"/>
+                <a16:creationId xmlns:a16="http://schemas.microsoft.com/office/drawing/2014/main" id="{0D791CA1-B919-451C-AF92-96FE06425397}"/>
               </a:ext>
             </a:extLst>
           </p:cNvPr>
@@ -12864,7 +12721,7 @@
           <p:cNvPr id="16" name="">
             <a:extLst xmlns:a="http://schemas.openxmlformats.org/drawingml/2006/main">
               <a:ext uri="{FF2B5EF4-FFF2-40B4-BE49-F238E27FC236}">
-                <a16:creationId xmlns:a16="http://schemas.microsoft.com/office/drawing/2014/main" id="{F1E93784-CB2C-4A93-A279-7929FBDED2A5}"/>
+                <a16:creationId xmlns:a16="http://schemas.microsoft.com/office/drawing/2014/main" id="{80F7876B-1890-45AF-9362-14C4E21A96FA}"/>
               </a:ext>
             </a:extLst>
           </p:cNvPr>
@@ -12921,7 +12778,7 @@
           <p:cNvPr id="17" name="">
             <a:extLst xmlns:a="http://schemas.openxmlformats.org/drawingml/2006/main">
               <a:ext uri="{FF2B5EF4-FFF2-40B4-BE49-F238E27FC236}">
-                <a16:creationId xmlns:a16="http://schemas.microsoft.com/office/drawing/2014/main" id="{DF13D6FC-5C6D-46F6-9109-E30DAA761BF1}"/>
+                <a16:creationId xmlns:a16="http://schemas.microsoft.com/office/drawing/2014/main" id="{0DE81C68-C038-4E3F-B4D7-17CE6730AFDE}"/>
               </a:ext>
             </a:extLst>
           </p:cNvPr>
@@ -12978,7 +12835,7 @@
           <p:cNvPr id="18" name="">
             <a:extLst xmlns:a="http://schemas.openxmlformats.org/drawingml/2006/main">
               <a:ext uri="{FF2B5EF4-FFF2-40B4-BE49-F238E27FC236}">
-                <a16:creationId xmlns:a16="http://schemas.microsoft.com/office/drawing/2014/main" id="{E2EAC7B2-7E38-4D5B-B676-8137D4760433}"/>
+                <a16:creationId xmlns:a16="http://schemas.microsoft.com/office/drawing/2014/main" id="{542FFBE7-4DCC-44E4-9DF5-A37CB089829A}"/>
               </a:ext>
             </a:extLst>
           </p:cNvPr>
@@ -13012,7 +12869,7 @@
           <p:cNvPr id="19" name="">
             <a:extLst xmlns:a="http://schemas.openxmlformats.org/drawingml/2006/main">
               <a:ext uri="{FF2B5EF4-FFF2-40B4-BE49-F238E27FC236}">
-                <a16:creationId xmlns:a16="http://schemas.microsoft.com/office/drawing/2014/main" id="{16D37401-9823-42BD-9843-0A18F9E9AA42}"/>
+                <a16:creationId xmlns:a16="http://schemas.microsoft.com/office/drawing/2014/main" id="{FB35CF9B-0A3B-4A51-BCE6-B49547ED148D}"/>
               </a:ext>
             </a:extLst>
           </p:cNvPr>
@@ -13044,7 +12901,7 @@
           <p:cNvPr id="20" name="">
             <a:extLst xmlns:a="http://schemas.openxmlformats.org/drawingml/2006/main">
               <a:ext uri="{FF2B5EF4-FFF2-40B4-BE49-F238E27FC236}">
-                <a16:creationId xmlns:a16="http://schemas.microsoft.com/office/drawing/2014/main" id="{9988A58B-74F9-4E44-9690-F5FBE67BA8D7}"/>
+                <a16:creationId xmlns:a16="http://schemas.microsoft.com/office/drawing/2014/main" id="{04F3910F-B43E-4B8B-8C8C-0C622DDDEFCE}"/>
               </a:ext>
             </a:extLst>
           </p:cNvPr>
@@ -13101,7 +12958,7 @@
           <p:cNvPr id="21" name="">
             <a:extLst xmlns:a="http://schemas.openxmlformats.org/drawingml/2006/main">
               <a:ext uri="{FF2B5EF4-FFF2-40B4-BE49-F238E27FC236}">
-                <a16:creationId xmlns:a16="http://schemas.microsoft.com/office/drawing/2014/main" id="{BEA01662-3098-41D5-9AF1-F4F6EE1D5E91}"/>
+                <a16:creationId xmlns:a16="http://schemas.microsoft.com/office/drawing/2014/main" id="{BE5BDB7B-0F6F-43F3-8141-B1E3A3F5F7FB}"/>
               </a:ext>
             </a:extLst>
           </p:cNvPr>
@@ -13158,7 +13015,7 @@
           <p:cNvPr id="22" name="">
             <a:extLst xmlns:a="http://schemas.openxmlformats.org/drawingml/2006/main">
               <a:ext uri="{FF2B5EF4-FFF2-40B4-BE49-F238E27FC236}">
-                <a16:creationId xmlns:a16="http://schemas.microsoft.com/office/drawing/2014/main" id="{B427AB4A-667B-4638-A30E-C0AC5ED0BE39}"/>
+                <a16:creationId xmlns:a16="http://schemas.microsoft.com/office/drawing/2014/main" id="{8721B6ED-68B5-4F2E-BCCE-63B084B2DF61}"/>
               </a:ext>
             </a:extLst>
           </p:cNvPr>
@@ -13213,7 +13070,7 @@
     </p:spTree>
     <p:extLst>
       <p:ext uri="{BB962C8B-B14F-4D97-AF65-F5344CB8AC3E}">
-        <p14:creationId xmlns:p14="http://schemas.microsoft.com/office/powerpoint/2010/main" val="1659149812"/>
+        <p14:creationId xmlns:p14="http://schemas.microsoft.com/office/powerpoint/2010/main" val="1691835531"/>
       </p:ext>
     </p:extLst>
   </p:cSld>
@@ -13414,7 +13271,7 @@
           <p:cNvPr id="22" name="">
             <a:extLst xmlns:a="http://schemas.openxmlformats.org/drawingml/2006/main">
               <a:ext uri="{FF2B5EF4-FFF2-40B4-BE49-F238E27FC236}">
-                <a16:creationId xmlns:a16="http://schemas.microsoft.com/office/drawing/2014/main" id="{D00413BC-E9BB-40D5-9849-80A7092C8FAB}"/>
+                <a16:creationId xmlns:a16="http://schemas.microsoft.com/office/drawing/2014/main" id="{08AC7D55-2FAD-46D9-9BA8-A809D8227F85}"/>
               </a:ext>
             </a:extLst>
           </p:cNvPr>
@@ -13446,7 +13303,7 @@
           <p:cNvPr id="2" name="">
             <a:extLst xmlns:a="http://schemas.openxmlformats.org/drawingml/2006/main">
               <a:ext uri="{FF2B5EF4-FFF2-40B4-BE49-F238E27FC236}">
-                <a16:creationId xmlns:a16="http://schemas.microsoft.com/office/drawing/2014/main" id="{78AD5FC2-6B7D-4290-8C0A-33702538FF57}"/>
+                <a16:creationId xmlns:a16="http://schemas.microsoft.com/office/drawing/2014/main" id="{96505559-C31A-472A-A124-9654836FA917}"/>
               </a:ext>
             </a:extLst>
           </p:cNvPr>
@@ -13503,7 +13360,7 @@
           <p:cNvPr id="3" name="">
             <a:extLst xmlns:a="http://schemas.openxmlformats.org/drawingml/2006/main">
               <a:ext uri="{FF2B5EF4-FFF2-40B4-BE49-F238E27FC236}">
-                <a16:creationId xmlns:a16="http://schemas.microsoft.com/office/drawing/2014/main" id="{B9118C4C-51E8-46C6-9785-4A6D7D125EBB}"/>
+                <a16:creationId xmlns:a16="http://schemas.microsoft.com/office/drawing/2014/main" id="{3E48432F-4AD6-4526-A0F1-8FBCA62E634D}"/>
               </a:ext>
             </a:extLst>
           </p:cNvPr>
@@ -13535,7 +13392,7 @@
           <p:cNvPr id="4" name="">
             <a:extLst xmlns:a="http://schemas.openxmlformats.org/drawingml/2006/main">
               <a:ext uri="{FF2B5EF4-FFF2-40B4-BE49-F238E27FC236}">
-                <a16:creationId xmlns:a16="http://schemas.microsoft.com/office/drawing/2014/main" id="{B557FEB0-953C-4687-B430-D507685155ED}"/>
+                <a16:creationId xmlns:a16="http://schemas.microsoft.com/office/drawing/2014/main" id="{7495BA40-D670-465F-8F88-2FD8A94870D7}"/>
               </a:ext>
             </a:extLst>
           </p:cNvPr>
@@ -13592,7 +13449,7 @@
           <p:cNvPr id="5" name="">
             <a:extLst xmlns:a="http://schemas.openxmlformats.org/drawingml/2006/main">
               <a:ext uri="{FF2B5EF4-FFF2-40B4-BE49-F238E27FC236}">
-                <a16:creationId xmlns:a16="http://schemas.microsoft.com/office/drawing/2014/main" id="{D7AE3B19-8CC9-48EC-9597-E2F2F4AB6B7A}"/>
+                <a16:creationId xmlns:a16="http://schemas.microsoft.com/office/drawing/2014/main" id="{16B0A5EB-CB23-4EDA-8592-BE02C7D88E66}"/>
               </a:ext>
             </a:extLst>
           </p:cNvPr>
@@ -13649,7 +13506,7 @@
           <p:cNvPr id="6" name="">
             <a:extLst xmlns:a="http://schemas.openxmlformats.org/drawingml/2006/main">
               <a:ext uri="{FF2B5EF4-FFF2-40B4-BE49-F238E27FC236}">
-                <a16:creationId xmlns:a16="http://schemas.microsoft.com/office/drawing/2014/main" id="{66A642E7-D10D-4D2D-9ABC-265AF419CF3D}"/>
+                <a16:creationId xmlns:a16="http://schemas.microsoft.com/office/drawing/2014/main" id="{D0762091-98D3-42CC-B013-A10E051D8B39}"/>
               </a:ext>
             </a:extLst>
           </p:cNvPr>
@@ -13706,7 +13563,7 @@
           <p:cNvPr id="7" name="">
             <a:extLst xmlns:a="http://schemas.openxmlformats.org/drawingml/2006/main">
               <a:ext uri="{FF2B5EF4-FFF2-40B4-BE49-F238E27FC236}">
-                <a16:creationId xmlns:a16="http://schemas.microsoft.com/office/drawing/2014/main" id="{8F78A8BF-0D51-4B84-97EA-40C7C8BAEAEE}"/>
+                <a16:creationId xmlns:a16="http://schemas.microsoft.com/office/drawing/2014/main" id="{5BFE391B-6385-4E68-8C39-992EF07F8496}"/>
               </a:ext>
             </a:extLst>
           </p:cNvPr>
@@ -13738,7 +13595,7 @@
           <p:cNvPr id="8" name="">
             <a:extLst xmlns:a="http://schemas.openxmlformats.org/drawingml/2006/main">
               <a:ext uri="{FF2B5EF4-FFF2-40B4-BE49-F238E27FC236}">
-                <a16:creationId xmlns:a16="http://schemas.microsoft.com/office/drawing/2014/main" id="{6D75F430-6CEC-47D0-97B5-446654EE1BB7}"/>
+                <a16:creationId xmlns:a16="http://schemas.microsoft.com/office/drawing/2014/main" id="{9DD567D9-1C61-4C8A-9168-9473128DF3B8}"/>
               </a:ext>
             </a:extLst>
           </p:cNvPr>
@@ -13795,7 +13652,7 @@
           <p:cNvPr id="9" name="">
             <a:extLst xmlns:a="http://schemas.openxmlformats.org/drawingml/2006/main">
               <a:ext uri="{FF2B5EF4-FFF2-40B4-BE49-F238E27FC236}">
-                <a16:creationId xmlns:a16="http://schemas.microsoft.com/office/drawing/2014/main" id="{1529E769-1476-420A-A73C-D0EAF03AE8DC}"/>
+                <a16:creationId xmlns:a16="http://schemas.microsoft.com/office/drawing/2014/main" id="{7FCF8DE4-DB86-46DD-A6A7-A2FDBF7BD7CA}"/>
               </a:ext>
             </a:extLst>
           </p:cNvPr>
@@ -13852,7 +13709,7 @@
           <p:cNvPr id="10" name="">
             <a:extLst xmlns:a="http://schemas.openxmlformats.org/drawingml/2006/main">
               <a:ext uri="{FF2B5EF4-FFF2-40B4-BE49-F238E27FC236}">
-                <a16:creationId xmlns:a16="http://schemas.microsoft.com/office/drawing/2014/main" id="{81E7F440-AA81-41E0-80B4-B4CC715A6480}"/>
+                <a16:creationId xmlns:a16="http://schemas.microsoft.com/office/drawing/2014/main" id="{816F62BF-B9C2-47E2-8CD2-0DC1A429B2CE}"/>
               </a:ext>
             </a:extLst>
           </p:cNvPr>
@@ -13886,7 +13743,7 @@
           <p:cNvPr id="11" name="">
             <a:extLst xmlns:a="http://schemas.openxmlformats.org/drawingml/2006/main">
               <a:ext uri="{FF2B5EF4-FFF2-40B4-BE49-F238E27FC236}">
-                <a16:creationId xmlns:a16="http://schemas.microsoft.com/office/drawing/2014/main" id="{2828FF6F-FB9A-4258-982A-2DB09DD4E1A2}"/>
+                <a16:creationId xmlns:a16="http://schemas.microsoft.com/office/drawing/2014/main" id="{8FE30C7E-2EF6-4935-9C37-5BBD114627F2}"/>
               </a:ext>
             </a:extLst>
           </p:cNvPr>
@@ -13918,7 +13775,7 @@
           <p:cNvPr id="12" name="">
             <a:extLst xmlns:a="http://schemas.openxmlformats.org/drawingml/2006/main">
               <a:ext uri="{FF2B5EF4-FFF2-40B4-BE49-F238E27FC236}">
-                <a16:creationId xmlns:a16="http://schemas.microsoft.com/office/drawing/2014/main" id="{E72FC500-80D6-4F2A-BB85-77F7CAB043F8}"/>
+                <a16:creationId xmlns:a16="http://schemas.microsoft.com/office/drawing/2014/main" id="{04D47EA2-AB57-4F1E-833D-9D593BFB1BAB}"/>
               </a:ext>
             </a:extLst>
           </p:cNvPr>
@@ -13975,7 +13832,7 @@
           <p:cNvPr id="13" name="">
             <a:extLst xmlns:a="http://schemas.openxmlformats.org/drawingml/2006/main">
               <a:ext uri="{FF2B5EF4-FFF2-40B4-BE49-F238E27FC236}">
-                <a16:creationId xmlns:a16="http://schemas.microsoft.com/office/drawing/2014/main" id="{60EC226A-5A22-4468-8F08-FB5351170D6F}"/>
+                <a16:creationId xmlns:a16="http://schemas.microsoft.com/office/drawing/2014/main" id="{DF601C44-ECC0-4C80-A369-625F3D363A33}"/>
               </a:ext>
             </a:extLst>
           </p:cNvPr>
@@ -14032,7 +13889,7 @@
           <p:cNvPr id="14" name="">
             <a:extLst xmlns:a="http://schemas.openxmlformats.org/drawingml/2006/main">
               <a:ext uri="{FF2B5EF4-FFF2-40B4-BE49-F238E27FC236}">
-                <a16:creationId xmlns:a16="http://schemas.microsoft.com/office/drawing/2014/main" id="{F04AA4EC-7D4A-4569-8D94-FBB9EEA7C2F9}"/>
+                <a16:creationId xmlns:a16="http://schemas.microsoft.com/office/drawing/2014/main" id="{2C274B6C-A70F-40E8-86FC-55FD4A6E4D4C}"/>
               </a:ext>
             </a:extLst>
           </p:cNvPr>
@@ -14066,7 +13923,7 @@
           <p:cNvPr id="15" name="">
             <a:extLst xmlns:a="http://schemas.openxmlformats.org/drawingml/2006/main">
               <a:ext uri="{FF2B5EF4-FFF2-40B4-BE49-F238E27FC236}">
-                <a16:creationId xmlns:a16="http://schemas.microsoft.com/office/drawing/2014/main" id="{3EFC7ABF-A94D-4FCF-9467-E2AE1ADBD6FA}"/>
+                <a16:creationId xmlns:a16="http://schemas.microsoft.com/office/drawing/2014/main" id="{76BA57D9-42DB-403C-B789-BECF99197F20}"/>
               </a:ext>
             </a:extLst>
           </p:cNvPr>
@@ -14098,7 +13955,7 @@
           <p:cNvPr id="16" name="">
             <a:extLst xmlns:a="http://schemas.openxmlformats.org/drawingml/2006/main">
               <a:ext uri="{FF2B5EF4-FFF2-40B4-BE49-F238E27FC236}">
-                <a16:creationId xmlns:a16="http://schemas.microsoft.com/office/drawing/2014/main" id="{16811A36-FC4C-45E6-B003-3079005C6A2E}"/>
+                <a16:creationId xmlns:a16="http://schemas.microsoft.com/office/drawing/2014/main" id="{B9FB4033-A355-4706-8410-7A5754BD1A3F}"/>
               </a:ext>
             </a:extLst>
           </p:cNvPr>
@@ -14155,7 +14012,7 @@
           <p:cNvPr id="17" name="">
             <a:extLst xmlns:a="http://schemas.openxmlformats.org/drawingml/2006/main">
               <a:ext uri="{FF2B5EF4-FFF2-40B4-BE49-F238E27FC236}">
-                <a16:creationId xmlns:a16="http://schemas.microsoft.com/office/drawing/2014/main" id="{BB914F69-3180-42B7-BF1F-07D11D69FDD7}"/>
+                <a16:creationId xmlns:a16="http://schemas.microsoft.com/office/drawing/2014/main" id="{38CA2F95-893F-40AF-A2CF-46E7EB7FC2D7}"/>
               </a:ext>
             </a:extLst>
           </p:cNvPr>
@@ -14212,7 +14069,7 @@
           <p:cNvPr id="18" name="">
             <a:extLst xmlns:a="http://schemas.openxmlformats.org/drawingml/2006/main">
               <a:ext uri="{FF2B5EF4-FFF2-40B4-BE49-F238E27FC236}">
-                <a16:creationId xmlns:a16="http://schemas.microsoft.com/office/drawing/2014/main" id="{2C206355-7824-4DB0-8767-07697668F850}"/>
+                <a16:creationId xmlns:a16="http://schemas.microsoft.com/office/drawing/2014/main" id="{A1BA266D-3AD4-41C9-8414-7B1CD38D4E19}"/>
               </a:ext>
             </a:extLst>
           </p:cNvPr>
@@ -14246,7 +14103,7 @@
           <p:cNvPr id="19" name="">
             <a:extLst xmlns:a="http://schemas.openxmlformats.org/drawingml/2006/main">
               <a:ext uri="{FF2B5EF4-FFF2-40B4-BE49-F238E27FC236}">
-                <a16:creationId xmlns:a16="http://schemas.microsoft.com/office/drawing/2014/main" id="{0BC1A3D1-6CD2-4459-AB3C-5C2761E39385}"/>
+                <a16:creationId xmlns:a16="http://schemas.microsoft.com/office/drawing/2014/main" id="{8E69B2B8-1D36-4B42-BD4A-120101D8DA2E}"/>
               </a:ext>
             </a:extLst>
           </p:cNvPr>
@@ -14278,7 +14135,7 @@
           <p:cNvPr id="20" name="">
             <a:extLst xmlns:a="http://schemas.openxmlformats.org/drawingml/2006/main">
               <a:ext uri="{FF2B5EF4-FFF2-40B4-BE49-F238E27FC236}">
-                <a16:creationId xmlns:a16="http://schemas.microsoft.com/office/drawing/2014/main" id="{4768E424-55C7-4A65-89D8-479F52AFF205}"/>
+                <a16:creationId xmlns:a16="http://schemas.microsoft.com/office/drawing/2014/main" id="{DEA0188F-2988-4747-9E4D-6EBBF7780C92}"/>
               </a:ext>
             </a:extLst>
           </p:cNvPr>
@@ -14335,7 +14192,7 @@
           <p:cNvPr id="21" name="">
             <a:extLst xmlns:a="http://schemas.openxmlformats.org/drawingml/2006/main">
               <a:ext uri="{FF2B5EF4-FFF2-40B4-BE49-F238E27FC236}">
-                <a16:creationId xmlns:a16="http://schemas.microsoft.com/office/drawing/2014/main" id="{F68CADFD-4933-43F2-858F-F37802695D29}"/>
+                <a16:creationId xmlns:a16="http://schemas.microsoft.com/office/drawing/2014/main" id="{06FF48A5-9738-4621-B6E8-14F668FF9A54}"/>
               </a:ext>
             </a:extLst>
           </p:cNvPr>
@@ -14390,7 +14247,7 @@
     </p:spTree>
     <p:extLst>
       <p:ext uri="{BB962C8B-B14F-4D97-AF65-F5344CB8AC3E}">
-        <p14:creationId xmlns:p14="http://schemas.microsoft.com/office/powerpoint/2010/main" val="911993950"/>
+        <p14:creationId xmlns:p14="http://schemas.microsoft.com/office/powerpoint/2010/main" val="145261894"/>
       </p:ext>
     </p:extLst>
   </p:cSld>
